--- a/main/chapter2/figures/sewformer.pptx
+++ b/main/chapter2/figures/sewformer.pptx
@@ -4,6 +4,9 @@
   <p:sldMasterIdLst>
     <p:sldMasterId id="2147483648" r:id="rId1"/>
   </p:sldMasterIdLst>
+  <p:notesMasterIdLst>
+    <p:notesMasterId r:id="rId3"/>
+  </p:notesMasterIdLst>
   <p:sldIdLst>
     <p:sldId id="256" r:id="rId2"/>
   </p:sldIdLst>
@@ -104,7 +107,445 @@
       </a:defRPr>
     </a:lvl9pPr>
   </p:defaultTextStyle>
+  <p:extLst>
+    <p:ext uri="{EFAFB233-063F-42B5-8137-9DF3F51BA10A}">
+      <p15:sldGuideLst xmlns:p15="http://schemas.microsoft.com/office/powerpoint/2012/main"/>
+    </p:ext>
+  </p:extLst>
 </p:presentation>
+</file>
+
+<file path=ppt/notesMasters/notesMaster1.xml><?xml version="1.0" encoding="utf-8"?>
+<p:notesMaster xmlns:a="http://schemas.openxmlformats.org/drawingml/2006/main" xmlns:r="http://schemas.openxmlformats.org/officeDocument/2006/relationships" xmlns:p="http://schemas.openxmlformats.org/presentationml/2006/main">
+  <p:cSld>
+    <p:bg>
+      <p:bgRef idx="1001">
+        <a:schemeClr val="bg1"/>
+      </p:bgRef>
+    </p:bg>
+    <p:spTree>
+      <p:nvGrpSpPr>
+        <p:cNvPr id="1" name=""/>
+        <p:cNvGrpSpPr/>
+        <p:nvPr/>
+      </p:nvGrpSpPr>
+      <p:grpSpPr>
+        <a:xfrm>
+          <a:off x="0" y="0"/>
+          <a:ext cx="0" cy="0"/>
+          <a:chOff x="0" y="0"/>
+          <a:chExt cx="0" cy="0"/>
+        </a:xfrm>
+      </p:grpSpPr>
+      <p:sp>
+        <p:nvSpPr>
+          <p:cNvPr id="2" name="页眉占位符 1"/>
+          <p:cNvSpPr>
+            <a:spLocks noGrp="1"/>
+          </p:cNvSpPr>
+          <p:nvPr>
+            <p:ph type="hdr" sz="quarter"/>
+          </p:nvPr>
+        </p:nvSpPr>
+        <p:spPr>
+          <a:xfrm>
+            <a:off x="0" y="0"/>
+            <a:ext cx="2971800" cy="458788"/>
+          </a:xfrm>
+          <a:prstGeom prst="rect">
+            <a:avLst/>
+          </a:prstGeom>
+        </p:spPr>
+        <p:txBody>
+          <a:bodyPr vert="horz" lIns="91440" tIns="45720" rIns="91440" bIns="45720" rtlCol="0"/>
+          <a:lstStyle>
+            <a:lvl1pPr algn="l">
+              <a:defRPr sz="1200"/>
+            </a:lvl1pPr>
+          </a:lstStyle>
+          <a:p>
+            <a:endParaRPr kumimoji="1" lang="zh-CN" altLang="en-US"/>
+          </a:p>
+        </p:txBody>
+      </p:sp>
+      <p:sp>
+        <p:nvSpPr>
+          <p:cNvPr id="3" name="日期占位符 2"/>
+          <p:cNvSpPr>
+            <a:spLocks noGrp="1"/>
+          </p:cNvSpPr>
+          <p:nvPr>
+            <p:ph type="dt" idx="1"/>
+          </p:nvPr>
+        </p:nvSpPr>
+        <p:spPr>
+          <a:xfrm>
+            <a:off x="3884613" y="0"/>
+            <a:ext cx="2971800" cy="458788"/>
+          </a:xfrm>
+          <a:prstGeom prst="rect">
+            <a:avLst/>
+          </a:prstGeom>
+        </p:spPr>
+        <p:txBody>
+          <a:bodyPr vert="horz" lIns="91440" tIns="45720" rIns="91440" bIns="45720" rtlCol="0"/>
+          <a:lstStyle>
+            <a:lvl1pPr algn="r">
+              <a:defRPr sz="1200"/>
+            </a:lvl1pPr>
+          </a:lstStyle>
+          <a:p>
+            <a:fld id="{14DBC5EE-6DF4-5F4F-9FA0-A1E06C35E75B}" type="datetimeFigureOut">
+              <a:rPr kumimoji="1" lang="zh-CN" altLang="en-US" smtClean="0"/>
+              <a:t>2026/3/29</a:t>
+            </a:fld>
+            <a:endParaRPr kumimoji="1" lang="zh-CN" altLang="en-US"/>
+          </a:p>
+        </p:txBody>
+      </p:sp>
+      <p:sp>
+        <p:nvSpPr>
+          <p:cNvPr id="4" name="幻灯片图像占位符 3"/>
+          <p:cNvSpPr>
+            <a:spLocks noGrp="1" noRot="1" noChangeAspect="1"/>
+          </p:cNvSpPr>
+          <p:nvPr>
+            <p:ph type="sldImg" idx="2"/>
+          </p:nvPr>
+        </p:nvSpPr>
+        <p:spPr>
+          <a:xfrm>
+            <a:off x="685800" y="1143000"/>
+            <a:ext cx="5486400" cy="3086100"/>
+          </a:xfrm>
+          <a:prstGeom prst="rect">
+            <a:avLst/>
+          </a:prstGeom>
+          <a:noFill/>
+          <a:ln w="12700">
+            <a:solidFill>
+              <a:prstClr val="black"/>
+            </a:solidFill>
+          </a:ln>
+        </p:spPr>
+        <p:txBody>
+          <a:bodyPr vert="horz" lIns="91440" tIns="45720" rIns="91440" bIns="45720" rtlCol="0" anchor="ctr"/>
+          <a:lstStyle/>
+          <a:p>
+            <a:endParaRPr lang="zh-CN" altLang="en-US"/>
+          </a:p>
+        </p:txBody>
+      </p:sp>
+      <p:sp>
+        <p:nvSpPr>
+          <p:cNvPr id="5" name="备注占位符 4"/>
+          <p:cNvSpPr>
+            <a:spLocks noGrp="1"/>
+          </p:cNvSpPr>
+          <p:nvPr>
+            <p:ph type="body" sz="quarter" idx="3"/>
+          </p:nvPr>
+        </p:nvSpPr>
+        <p:spPr>
+          <a:xfrm>
+            <a:off x="685800" y="4400550"/>
+            <a:ext cx="5486400" cy="3600450"/>
+          </a:xfrm>
+          <a:prstGeom prst="rect">
+            <a:avLst/>
+          </a:prstGeom>
+        </p:spPr>
+        <p:txBody>
+          <a:bodyPr vert="horz" lIns="91440" tIns="45720" rIns="91440" bIns="45720" rtlCol="0"/>
+          <a:lstStyle/>
+          <a:p>
+            <a:pPr lvl="0"/>
+            <a:r>
+              <a:rPr kumimoji="1" lang="zh-CN" altLang="en-US"/>
+              <a:t>单击此处编辑母版文本样式</a:t>
+            </a:r>
+          </a:p>
+          <a:p>
+            <a:pPr lvl="1"/>
+            <a:r>
+              <a:rPr kumimoji="1" lang="zh-CN" altLang="en-US"/>
+              <a:t>二级</a:t>
+            </a:r>
+          </a:p>
+          <a:p>
+            <a:pPr lvl="2"/>
+            <a:r>
+              <a:rPr kumimoji="1" lang="zh-CN" altLang="en-US"/>
+              <a:t>三级</a:t>
+            </a:r>
+          </a:p>
+          <a:p>
+            <a:pPr lvl="3"/>
+            <a:r>
+              <a:rPr kumimoji="1" lang="zh-CN" altLang="en-US"/>
+              <a:t>四级</a:t>
+            </a:r>
+          </a:p>
+          <a:p>
+            <a:pPr lvl="4"/>
+            <a:r>
+              <a:rPr kumimoji="1" lang="zh-CN" altLang="en-US"/>
+              <a:t>五级</a:t>
+            </a:r>
+          </a:p>
+        </p:txBody>
+      </p:sp>
+      <p:sp>
+        <p:nvSpPr>
+          <p:cNvPr id="6" name="页脚占位符 5"/>
+          <p:cNvSpPr>
+            <a:spLocks noGrp="1"/>
+          </p:cNvSpPr>
+          <p:nvPr>
+            <p:ph type="ftr" sz="quarter" idx="4"/>
+          </p:nvPr>
+        </p:nvSpPr>
+        <p:spPr>
+          <a:xfrm>
+            <a:off x="0" y="8685213"/>
+            <a:ext cx="2971800" cy="458787"/>
+          </a:xfrm>
+          <a:prstGeom prst="rect">
+            <a:avLst/>
+          </a:prstGeom>
+        </p:spPr>
+        <p:txBody>
+          <a:bodyPr vert="horz" lIns="91440" tIns="45720" rIns="91440" bIns="45720" rtlCol="0" anchor="b"/>
+          <a:lstStyle>
+            <a:lvl1pPr algn="l">
+              <a:defRPr sz="1200"/>
+            </a:lvl1pPr>
+          </a:lstStyle>
+          <a:p>
+            <a:endParaRPr kumimoji="1" lang="zh-CN" altLang="en-US"/>
+          </a:p>
+        </p:txBody>
+      </p:sp>
+      <p:sp>
+        <p:nvSpPr>
+          <p:cNvPr id="7" name="灯片编号占位符 6"/>
+          <p:cNvSpPr>
+            <a:spLocks noGrp="1"/>
+          </p:cNvSpPr>
+          <p:nvPr>
+            <p:ph type="sldNum" sz="quarter" idx="5"/>
+          </p:nvPr>
+        </p:nvSpPr>
+        <p:spPr>
+          <a:xfrm>
+            <a:off x="3884613" y="8685213"/>
+            <a:ext cx="2971800" cy="458787"/>
+          </a:xfrm>
+          <a:prstGeom prst="rect">
+            <a:avLst/>
+          </a:prstGeom>
+        </p:spPr>
+        <p:txBody>
+          <a:bodyPr vert="horz" lIns="91440" tIns="45720" rIns="91440" bIns="45720" rtlCol="0" anchor="b"/>
+          <a:lstStyle>
+            <a:lvl1pPr algn="r">
+              <a:defRPr sz="1200"/>
+            </a:lvl1pPr>
+          </a:lstStyle>
+          <a:p>
+            <a:fld id="{CFF7774F-9B1E-CD4B-9F20-CC6ECCBE7C77}" type="slidenum">
+              <a:rPr kumimoji="1" lang="zh-CN" altLang="en-US" smtClean="0"/>
+              <a:t>‹#›</a:t>
+            </a:fld>
+            <a:endParaRPr kumimoji="1" lang="zh-CN" altLang="en-US"/>
+          </a:p>
+        </p:txBody>
+      </p:sp>
+    </p:spTree>
+    <p:extLst>
+      <p:ext uri="{BB962C8B-B14F-4D97-AF65-F5344CB8AC3E}">
+        <p14:creationId xmlns:p14="http://schemas.microsoft.com/office/powerpoint/2010/main" val="181533750"/>
+      </p:ext>
+    </p:extLst>
+  </p:cSld>
+  <p:clrMap bg1="lt1" tx1="dk1" bg2="lt2" tx2="dk2" accent1="accent1" accent2="accent2" accent3="accent3" accent4="accent4" accent5="accent5" accent6="accent6" hlink="hlink" folHlink="folHlink"/>
+  <p:notesStyle>
+    <a:lvl1pPr marL="0" algn="l" defTabSz="914400" rtl="0" eaLnBrk="1" latinLnBrk="0" hangingPunct="1">
+      <a:defRPr sz="1200" kern="1200">
+        <a:solidFill>
+          <a:schemeClr val="tx1"/>
+        </a:solidFill>
+        <a:latin typeface="+mn-lt"/>
+        <a:ea typeface="+mn-ea"/>
+        <a:cs typeface="+mn-cs"/>
+      </a:defRPr>
+    </a:lvl1pPr>
+    <a:lvl2pPr marL="457200" algn="l" defTabSz="914400" rtl="0" eaLnBrk="1" latinLnBrk="0" hangingPunct="1">
+      <a:defRPr sz="1200" kern="1200">
+        <a:solidFill>
+          <a:schemeClr val="tx1"/>
+        </a:solidFill>
+        <a:latin typeface="+mn-lt"/>
+        <a:ea typeface="+mn-ea"/>
+        <a:cs typeface="+mn-cs"/>
+      </a:defRPr>
+    </a:lvl2pPr>
+    <a:lvl3pPr marL="914400" algn="l" defTabSz="914400" rtl="0" eaLnBrk="1" latinLnBrk="0" hangingPunct="1">
+      <a:defRPr sz="1200" kern="1200">
+        <a:solidFill>
+          <a:schemeClr val="tx1"/>
+        </a:solidFill>
+        <a:latin typeface="+mn-lt"/>
+        <a:ea typeface="+mn-ea"/>
+        <a:cs typeface="+mn-cs"/>
+      </a:defRPr>
+    </a:lvl3pPr>
+    <a:lvl4pPr marL="1371600" algn="l" defTabSz="914400" rtl="0" eaLnBrk="1" latinLnBrk="0" hangingPunct="1">
+      <a:defRPr sz="1200" kern="1200">
+        <a:solidFill>
+          <a:schemeClr val="tx1"/>
+        </a:solidFill>
+        <a:latin typeface="+mn-lt"/>
+        <a:ea typeface="+mn-ea"/>
+        <a:cs typeface="+mn-cs"/>
+      </a:defRPr>
+    </a:lvl4pPr>
+    <a:lvl5pPr marL="1828800" algn="l" defTabSz="914400" rtl="0" eaLnBrk="1" latinLnBrk="0" hangingPunct="1">
+      <a:defRPr sz="1200" kern="1200">
+        <a:solidFill>
+          <a:schemeClr val="tx1"/>
+        </a:solidFill>
+        <a:latin typeface="+mn-lt"/>
+        <a:ea typeface="+mn-ea"/>
+        <a:cs typeface="+mn-cs"/>
+      </a:defRPr>
+    </a:lvl5pPr>
+    <a:lvl6pPr marL="2286000" algn="l" defTabSz="914400" rtl="0" eaLnBrk="1" latinLnBrk="0" hangingPunct="1">
+      <a:defRPr sz="1200" kern="1200">
+        <a:solidFill>
+          <a:schemeClr val="tx1"/>
+        </a:solidFill>
+        <a:latin typeface="+mn-lt"/>
+        <a:ea typeface="+mn-ea"/>
+        <a:cs typeface="+mn-cs"/>
+      </a:defRPr>
+    </a:lvl6pPr>
+    <a:lvl7pPr marL="2743200" algn="l" defTabSz="914400" rtl="0" eaLnBrk="1" latinLnBrk="0" hangingPunct="1">
+      <a:defRPr sz="1200" kern="1200">
+        <a:solidFill>
+          <a:schemeClr val="tx1"/>
+        </a:solidFill>
+        <a:latin typeface="+mn-lt"/>
+        <a:ea typeface="+mn-ea"/>
+        <a:cs typeface="+mn-cs"/>
+      </a:defRPr>
+    </a:lvl7pPr>
+    <a:lvl8pPr marL="3200400" algn="l" defTabSz="914400" rtl="0" eaLnBrk="1" latinLnBrk="0" hangingPunct="1">
+      <a:defRPr sz="1200" kern="1200">
+        <a:solidFill>
+          <a:schemeClr val="tx1"/>
+        </a:solidFill>
+        <a:latin typeface="+mn-lt"/>
+        <a:ea typeface="+mn-ea"/>
+        <a:cs typeface="+mn-cs"/>
+      </a:defRPr>
+    </a:lvl8pPr>
+    <a:lvl9pPr marL="3657600" algn="l" defTabSz="914400" rtl="0" eaLnBrk="1" latinLnBrk="0" hangingPunct="1">
+      <a:defRPr sz="1200" kern="1200">
+        <a:solidFill>
+          <a:schemeClr val="tx1"/>
+        </a:solidFill>
+        <a:latin typeface="+mn-lt"/>
+        <a:ea typeface="+mn-ea"/>
+        <a:cs typeface="+mn-cs"/>
+      </a:defRPr>
+    </a:lvl9pPr>
+  </p:notesStyle>
+</p:notesMaster>
+</file>
+
+<file path=ppt/notesSlides/notesSlide1.xml><?xml version="1.0" encoding="utf-8"?>
+<p:notes xmlns:a="http://schemas.openxmlformats.org/drawingml/2006/main" xmlns:r="http://schemas.openxmlformats.org/officeDocument/2006/relationships" xmlns:p="http://schemas.openxmlformats.org/presentationml/2006/main">
+  <p:cSld>
+    <p:spTree>
+      <p:nvGrpSpPr>
+        <p:cNvPr id="1" name=""/>
+        <p:cNvGrpSpPr/>
+        <p:nvPr/>
+      </p:nvGrpSpPr>
+      <p:grpSpPr>
+        <a:xfrm>
+          <a:off x="0" y="0"/>
+          <a:ext cx="0" cy="0"/>
+          <a:chOff x="0" y="0"/>
+          <a:chExt cx="0" cy="0"/>
+        </a:xfrm>
+      </p:grpSpPr>
+      <p:sp>
+        <p:nvSpPr>
+          <p:cNvPr id="2" name="幻灯片图像占位符 1"/>
+          <p:cNvSpPr>
+            <a:spLocks noGrp="1" noRot="1" noChangeAspect="1"/>
+          </p:cNvSpPr>
+          <p:nvPr>
+            <p:ph type="sldImg"/>
+          </p:nvPr>
+        </p:nvSpPr>
+        <p:spPr/>
+      </p:sp>
+      <p:sp>
+        <p:nvSpPr>
+          <p:cNvPr id="3" name="备注占位符 2"/>
+          <p:cNvSpPr>
+            <a:spLocks noGrp="1"/>
+          </p:cNvSpPr>
+          <p:nvPr>
+            <p:ph type="body" idx="1"/>
+          </p:nvPr>
+        </p:nvSpPr>
+        <p:spPr/>
+        <p:txBody>
+          <a:bodyPr/>
+          <a:lstStyle/>
+          <a:p>
+            <a:endParaRPr kumimoji="1" lang="zh-CN" altLang="en-US" dirty="0"/>
+          </a:p>
+        </p:txBody>
+      </p:sp>
+      <p:sp>
+        <p:nvSpPr>
+          <p:cNvPr id="4" name="灯片编号占位符 3"/>
+          <p:cNvSpPr>
+            <a:spLocks noGrp="1"/>
+          </p:cNvSpPr>
+          <p:nvPr>
+            <p:ph type="sldNum" sz="quarter" idx="5"/>
+          </p:nvPr>
+        </p:nvSpPr>
+        <p:spPr/>
+        <p:txBody>
+          <a:bodyPr/>
+          <a:lstStyle/>
+          <a:p>
+            <a:fld id="{CFF7774F-9B1E-CD4B-9F20-CC6ECCBE7C77}" type="slidenum">
+              <a:rPr kumimoji="1" lang="zh-CN" altLang="en-US" smtClean="0"/>
+              <a:t>1</a:t>
+            </a:fld>
+            <a:endParaRPr kumimoji="1" lang="zh-CN" altLang="en-US"/>
+          </a:p>
+        </p:txBody>
+      </p:sp>
+    </p:spTree>
+    <p:extLst>
+      <p:ext uri="{BB962C8B-B14F-4D97-AF65-F5344CB8AC3E}">
+        <p14:creationId xmlns:p14="http://schemas.microsoft.com/office/powerpoint/2010/main" val="2035785880"/>
+      </p:ext>
+    </p:extLst>
+  </p:cSld>
+  <p:clrMapOvr>
+    <a:masterClrMapping/>
+  </p:clrMapOvr>
+</p:notes>
 </file>
 
 <file path=ppt/slideLayouts/slideLayout1.xml><?xml version="1.0" encoding="utf-8"?>
@@ -254,7 +695,7 @@
           <a:p>
             <a:fld id="{08EFC4F4-C477-594F-BA38-E64EFA0A205E}" type="datetimeFigureOut">
               <a:rPr kumimoji="1" lang="zh-CN" altLang="en-US" smtClean="0"/>
-              <a:t>2026/3/8</a:t>
+              <a:t>2026/3/29</a:t>
             </a:fld>
             <a:endParaRPr kumimoji="1" lang="zh-CN" altLang="en-US"/>
           </a:p>
@@ -452,7 +893,7 @@
           <a:p>
             <a:fld id="{08EFC4F4-C477-594F-BA38-E64EFA0A205E}" type="datetimeFigureOut">
               <a:rPr kumimoji="1" lang="zh-CN" altLang="en-US" smtClean="0"/>
-              <a:t>2026/3/8</a:t>
+              <a:t>2026/3/29</a:t>
             </a:fld>
             <a:endParaRPr kumimoji="1" lang="zh-CN" altLang="en-US"/>
           </a:p>
@@ -660,7 +1101,7 @@
           <a:p>
             <a:fld id="{08EFC4F4-C477-594F-BA38-E64EFA0A205E}" type="datetimeFigureOut">
               <a:rPr kumimoji="1" lang="zh-CN" altLang="en-US" smtClean="0"/>
-              <a:t>2026/3/8</a:t>
+              <a:t>2026/3/29</a:t>
             </a:fld>
             <a:endParaRPr kumimoji="1" lang="zh-CN" altLang="en-US"/>
           </a:p>
@@ -858,7 +1299,7 @@
           <a:p>
             <a:fld id="{08EFC4F4-C477-594F-BA38-E64EFA0A205E}" type="datetimeFigureOut">
               <a:rPr kumimoji="1" lang="zh-CN" altLang="en-US" smtClean="0"/>
-              <a:t>2026/3/8</a:t>
+              <a:t>2026/3/29</a:t>
             </a:fld>
             <a:endParaRPr kumimoji="1" lang="zh-CN" altLang="en-US"/>
           </a:p>
@@ -1133,7 +1574,7 @@
           <a:p>
             <a:fld id="{08EFC4F4-C477-594F-BA38-E64EFA0A205E}" type="datetimeFigureOut">
               <a:rPr kumimoji="1" lang="zh-CN" altLang="en-US" smtClean="0"/>
-              <a:t>2026/3/8</a:t>
+              <a:t>2026/3/29</a:t>
             </a:fld>
             <a:endParaRPr kumimoji="1" lang="zh-CN" altLang="en-US"/>
           </a:p>
@@ -1398,7 +1839,7 @@
           <a:p>
             <a:fld id="{08EFC4F4-C477-594F-BA38-E64EFA0A205E}" type="datetimeFigureOut">
               <a:rPr kumimoji="1" lang="zh-CN" altLang="en-US" smtClean="0"/>
-              <a:t>2026/3/8</a:t>
+              <a:t>2026/3/29</a:t>
             </a:fld>
             <a:endParaRPr kumimoji="1" lang="zh-CN" altLang="en-US"/>
           </a:p>
@@ -1810,7 +2251,7 @@
           <a:p>
             <a:fld id="{08EFC4F4-C477-594F-BA38-E64EFA0A205E}" type="datetimeFigureOut">
               <a:rPr kumimoji="1" lang="zh-CN" altLang="en-US" smtClean="0"/>
-              <a:t>2026/3/8</a:t>
+              <a:t>2026/3/29</a:t>
             </a:fld>
             <a:endParaRPr kumimoji="1" lang="zh-CN" altLang="en-US"/>
           </a:p>
@@ -1951,7 +2392,7 @@
           <a:p>
             <a:fld id="{08EFC4F4-C477-594F-BA38-E64EFA0A205E}" type="datetimeFigureOut">
               <a:rPr kumimoji="1" lang="zh-CN" altLang="en-US" smtClean="0"/>
-              <a:t>2026/3/8</a:t>
+              <a:t>2026/3/29</a:t>
             </a:fld>
             <a:endParaRPr kumimoji="1" lang="zh-CN" altLang="en-US"/>
           </a:p>
@@ -2064,7 +2505,7 @@
           <a:p>
             <a:fld id="{08EFC4F4-C477-594F-BA38-E64EFA0A205E}" type="datetimeFigureOut">
               <a:rPr kumimoji="1" lang="zh-CN" altLang="en-US" smtClean="0"/>
-              <a:t>2026/3/8</a:t>
+              <a:t>2026/3/29</a:t>
             </a:fld>
             <a:endParaRPr kumimoji="1" lang="zh-CN" altLang="en-US"/>
           </a:p>
@@ -2375,7 +2816,7 @@
           <a:p>
             <a:fld id="{08EFC4F4-C477-594F-BA38-E64EFA0A205E}" type="datetimeFigureOut">
               <a:rPr kumimoji="1" lang="zh-CN" altLang="en-US" smtClean="0"/>
-              <a:t>2026/3/8</a:t>
+              <a:t>2026/3/29</a:t>
             </a:fld>
             <a:endParaRPr kumimoji="1" lang="zh-CN" altLang="en-US"/>
           </a:p>
@@ -2663,7 +3104,7 @@
           <a:p>
             <a:fld id="{08EFC4F4-C477-594F-BA38-E64EFA0A205E}" type="datetimeFigureOut">
               <a:rPr kumimoji="1" lang="zh-CN" altLang="en-US" smtClean="0"/>
-              <a:t>2026/3/8</a:t>
+              <a:t>2026/3/29</a:t>
             </a:fld>
             <a:endParaRPr kumimoji="1" lang="zh-CN" altLang="en-US"/>
           </a:p>
@@ -2904,7 +3345,7 @@
           <a:p>
             <a:fld id="{08EFC4F4-C477-594F-BA38-E64EFA0A205E}" type="datetimeFigureOut">
               <a:rPr kumimoji="1" lang="zh-CN" altLang="en-US" smtClean="0"/>
-              <a:t>2026/3/8</a:t>
+              <a:t>2026/3/29</a:t>
             </a:fld>
             <a:endParaRPr kumimoji="1" lang="zh-CN" altLang="en-US"/>
           </a:p>
@@ -3336,14 +3777,14 @@
           <p:nvPr/>
         </p:nvPicPr>
         <p:blipFill>
-          <a:blip r:embed="rId2"/>
+          <a:blip r:embed="rId3"/>
           <a:stretch>
             <a:fillRect/>
           </a:stretch>
         </p:blipFill>
         <p:spPr>
           <a:xfrm>
-            <a:off x="468085" y="656991"/>
+            <a:off x="497967" y="704803"/>
             <a:ext cx="10940143" cy="5209198"/>
           </a:xfrm>
           <a:prstGeom prst="rect">
@@ -3351,6 +3792,1899 @@
           </a:prstGeom>
         </p:spPr>
       </p:pic>
+      <p:sp>
+        <p:nvSpPr>
+          <p:cNvPr id="3" name="矩形 2">
+            <a:extLst>
+              <a:ext uri="{FF2B5EF4-FFF2-40B4-BE49-F238E27FC236}">
+                <a16:creationId xmlns:a16="http://schemas.microsoft.com/office/drawing/2014/main" id="{E2E71540-889F-D54D-B4A6-2C65F0FC76AF}"/>
+              </a:ext>
+            </a:extLst>
+          </p:cNvPr>
+          <p:cNvSpPr/>
+          <p:nvPr/>
+        </p:nvSpPr>
+        <p:spPr>
+          <a:xfrm>
+            <a:off x="3735187" y="3983320"/>
+            <a:ext cx="415798" cy="1130463"/>
+          </a:xfrm>
+          <a:prstGeom prst="rect">
+            <a:avLst/>
+          </a:prstGeom>
+          <a:solidFill>
+            <a:srgbClr val="C9DBF7"/>
+          </a:solidFill>
+          <a:ln>
+            <a:noFill/>
+          </a:ln>
+        </p:spPr>
+        <p:style>
+          <a:lnRef idx="2">
+            <a:schemeClr val="accent1">
+              <a:shade val="50000"/>
+            </a:schemeClr>
+          </a:lnRef>
+          <a:fillRef idx="1">
+            <a:schemeClr val="accent1"/>
+          </a:fillRef>
+          <a:effectRef idx="0">
+            <a:schemeClr val="accent1"/>
+          </a:effectRef>
+          <a:fontRef idx="minor">
+            <a:schemeClr val="lt1"/>
+          </a:fontRef>
+        </p:style>
+        <p:txBody>
+          <a:bodyPr rtlCol="0" anchor="ctr"/>
+          <a:lstStyle/>
+          <a:p>
+            <a:pPr algn="ctr"/>
+            <a:endParaRPr kumimoji="1" lang="zh-CN" altLang="en-US" sz="1600"/>
+          </a:p>
+        </p:txBody>
+      </p:sp>
+      <p:sp>
+        <p:nvSpPr>
+          <p:cNvPr id="23" name="矩形 22">
+            <a:extLst>
+              <a:ext uri="{FF2B5EF4-FFF2-40B4-BE49-F238E27FC236}">
+                <a16:creationId xmlns:a16="http://schemas.microsoft.com/office/drawing/2014/main" id="{BB2BFB1B-8CE8-1B45-91BB-69E984B5CCC2}"/>
+              </a:ext>
+            </a:extLst>
+          </p:cNvPr>
+          <p:cNvSpPr/>
+          <p:nvPr/>
+        </p:nvSpPr>
+        <p:spPr>
+          <a:xfrm>
+            <a:off x="632177" y="2599092"/>
+            <a:ext cx="700940" cy="405878"/>
+          </a:xfrm>
+          <a:prstGeom prst="rect">
+            <a:avLst/>
+          </a:prstGeom>
+          <a:solidFill>
+            <a:srgbClr val="F3F3F3"/>
+          </a:solidFill>
+          <a:ln>
+            <a:noFill/>
+          </a:ln>
+        </p:spPr>
+        <p:style>
+          <a:lnRef idx="2">
+            <a:schemeClr val="accent1">
+              <a:shade val="50000"/>
+            </a:schemeClr>
+          </a:lnRef>
+          <a:fillRef idx="1">
+            <a:schemeClr val="accent1"/>
+          </a:fillRef>
+          <a:effectRef idx="0">
+            <a:schemeClr val="accent1"/>
+          </a:effectRef>
+          <a:fontRef idx="minor">
+            <a:schemeClr val="lt1"/>
+          </a:fontRef>
+        </p:style>
+        <p:txBody>
+          <a:bodyPr rtlCol="0" anchor="ctr"/>
+          <a:lstStyle/>
+          <a:p>
+            <a:pPr algn="ctr"/>
+            <a:endParaRPr kumimoji="1" lang="zh-CN" altLang="en-US" sz="1600"/>
+          </a:p>
+        </p:txBody>
+      </p:sp>
+      <p:sp>
+        <p:nvSpPr>
+          <p:cNvPr id="2" name="文本框 1">
+            <a:extLst>
+              <a:ext uri="{FF2B5EF4-FFF2-40B4-BE49-F238E27FC236}">
+                <a16:creationId xmlns:a16="http://schemas.microsoft.com/office/drawing/2014/main" id="{8DCCF423-99E4-2F41-B839-AC080922D8B1}"/>
+              </a:ext>
+            </a:extLst>
+          </p:cNvPr>
+          <p:cNvSpPr txBox="1"/>
+          <p:nvPr/>
+        </p:nvSpPr>
+        <p:spPr>
+          <a:xfrm>
+            <a:off x="633219" y="2487656"/>
+            <a:ext cx="516768" cy="461665"/>
+          </a:xfrm>
+          <a:prstGeom prst="rect">
+            <a:avLst/>
+          </a:prstGeom>
+          <a:noFill/>
+        </p:spPr>
+        <p:txBody>
+          <a:bodyPr wrap="square" rtlCol="0">
+            <a:spAutoFit/>
+          </a:bodyPr>
+          <a:lstStyle/>
+          <a:p>
+            <a:r>
+              <a:rPr kumimoji="1" lang="zh-CN" altLang="en-US" sz="1200" dirty="0">
+                <a:latin typeface="Times New Roman" panose="02020603050405020304" pitchFamily="18" charset="0"/>
+                <a:ea typeface="SimSun" panose="02010600030101010101" pitchFamily="2" charset="-122"/>
+                <a:cs typeface="Times New Roman" panose="02020603050405020304" pitchFamily="18" charset="0"/>
+              </a:rPr>
+              <a:t>版型参数</a:t>
+            </a:r>
+          </a:p>
+        </p:txBody>
+      </p:sp>
+      <p:sp>
+        <p:nvSpPr>
+          <p:cNvPr id="19" name="文本框 18">
+            <a:extLst>
+              <a:ext uri="{FF2B5EF4-FFF2-40B4-BE49-F238E27FC236}">
+                <a16:creationId xmlns:a16="http://schemas.microsoft.com/office/drawing/2014/main" id="{EB73E67E-203B-8841-B397-F328AC80A351}"/>
+              </a:ext>
+            </a:extLst>
+          </p:cNvPr>
+          <p:cNvSpPr txBox="1"/>
+          <p:nvPr/>
+        </p:nvSpPr>
+        <p:spPr>
+          <a:xfrm rot="5400000">
+            <a:off x="3392959" y="4299608"/>
+            <a:ext cx="1170000" cy="523220"/>
+          </a:xfrm>
+          <a:prstGeom prst="rect">
+            <a:avLst/>
+          </a:prstGeom>
+          <a:noFill/>
+        </p:spPr>
+        <p:txBody>
+          <a:bodyPr wrap="none" rtlCol="0">
+            <a:spAutoFit/>
+          </a:bodyPr>
+          <a:lstStyle/>
+          <a:p>
+            <a:r>
+              <a:rPr kumimoji="1" lang="en-US" altLang="zh-CN" sz="1400" b="1" dirty="0">
+                <a:latin typeface="Times New Roman" panose="02020603050405020304" pitchFamily="18" charset="0"/>
+                <a:ea typeface="SimSun" panose="02010600030101010101" pitchFamily="2" charset="-122"/>
+                <a:cs typeface="Times New Roman" panose="02020603050405020304" pitchFamily="18" charset="0"/>
+              </a:rPr>
+              <a:t>Transformer</a:t>
+            </a:r>
+          </a:p>
+          <a:p>
+            <a:pPr algn="ctr"/>
+            <a:r>
+              <a:rPr kumimoji="1" lang="zh-CN" altLang="en-US" sz="1400" b="1" dirty="0">
+                <a:latin typeface="Times New Roman" panose="02020603050405020304" pitchFamily="18" charset="0"/>
+                <a:ea typeface="SimSun" panose="02010600030101010101" pitchFamily="2" charset="-122"/>
+                <a:cs typeface="Times New Roman" panose="02020603050405020304" pitchFamily="18" charset="0"/>
+              </a:rPr>
+              <a:t>编码器</a:t>
+            </a:r>
+          </a:p>
+        </p:txBody>
+      </p:sp>
+      <p:sp>
+        <p:nvSpPr>
+          <p:cNvPr id="24" name="矩形 23">
+            <a:extLst>
+              <a:ext uri="{FF2B5EF4-FFF2-40B4-BE49-F238E27FC236}">
+                <a16:creationId xmlns:a16="http://schemas.microsoft.com/office/drawing/2014/main" id="{EC9F6B61-3999-CB4B-9B3F-5ABC3F339BBC}"/>
+              </a:ext>
+            </a:extLst>
+          </p:cNvPr>
+          <p:cNvSpPr/>
+          <p:nvPr/>
+        </p:nvSpPr>
+        <p:spPr>
+          <a:xfrm>
+            <a:off x="2657148" y="2582756"/>
+            <a:ext cx="605420" cy="386221"/>
+          </a:xfrm>
+          <a:prstGeom prst="rect">
+            <a:avLst/>
+          </a:prstGeom>
+          <a:solidFill>
+            <a:srgbClr val="F3F3F3"/>
+          </a:solidFill>
+          <a:ln>
+            <a:noFill/>
+          </a:ln>
+        </p:spPr>
+        <p:style>
+          <a:lnRef idx="2">
+            <a:schemeClr val="accent1">
+              <a:shade val="50000"/>
+            </a:schemeClr>
+          </a:lnRef>
+          <a:fillRef idx="1">
+            <a:schemeClr val="accent1"/>
+          </a:fillRef>
+          <a:effectRef idx="0">
+            <a:schemeClr val="accent1"/>
+          </a:effectRef>
+          <a:fontRef idx="minor">
+            <a:schemeClr val="lt1"/>
+          </a:fontRef>
+        </p:style>
+        <p:txBody>
+          <a:bodyPr rtlCol="0" anchor="ctr"/>
+          <a:lstStyle/>
+          <a:p>
+            <a:pPr algn="ctr"/>
+            <a:endParaRPr kumimoji="1" lang="zh-CN" altLang="en-US" sz="1600"/>
+          </a:p>
+        </p:txBody>
+      </p:sp>
+      <p:sp>
+        <p:nvSpPr>
+          <p:cNvPr id="6" name="文本框 5">
+            <a:extLst>
+              <a:ext uri="{FF2B5EF4-FFF2-40B4-BE49-F238E27FC236}">
+                <a16:creationId xmlns:a16="http://schemas.microsoft.com/office/drawing/2014/main" id="{FC2D34A0-5B20-FE4B-9B43-4AD0276F294A}"/>
+              </a:ext>
+            </a:extLst>
+          </p:cNvPr>
+          <p:cNvSpPr txBox="1"/>
+          <p:nvPr/>
+        </p:nvSpPr>
+        <p:spPr>
+          <a:xfrm>
+            <a:off x="2703959" y="2508599"/>
+            <a:ext cx="587020" cy="461665"/>
+          </a:xfrm>
+          <a:prstGeom prst="rect">
+            <a:avLst/>
+          </a:prstGeom>
+          <a:noFill/>
+        </p:spPr>
+        <p:txBody>
+          <a:bodyPr wrap="none" rtlCol="0">
+            <a:spAutoFit/>
+          </a:bodyPr>
+          <a:lstStyle/>
+          <a:p>
+            <a:r>
+              <a:rPr kumimoji="1" lang="zh-CN" altLang="en-US" sz="1200" dirty="0">
+                <a:latin typeface="Times New Roman" panose="02020603050405020304" pitchFamily="18" charset="0"/>
+                <a:ea typeface="SimSun" panose="02010600030101010101" pitchFamily="2" charset="-122"/>
+                <a:cs typeface="Times New Roman" panose="02020603050405020304" pitchFamily="18" charset="0"/>
+              </a:rPr>
+              <a:t>版型</a:t>
+            </a:r>
+            <a:endParaRPr kumimoji="1" lang="en-US" altLang="zh-CN" sz="1200" dirty="0">
+              <a:latin typeface="Times New Roman" panose="02020603050405020304" pitchFamily="18" charset="0"/>
+              <a:ea typeface="SimSun" panose="02010600030101010101" pitchFamily="2" charset="-122"/>
+              <a:cs typeface="Times New Roman" panose="02020603050405020304" pitchFamily="18" charset="0"/>
+            </a:endParaRPr>
+          </a:p>
+          <a:p>
+            <a:r>
+              <a:rPr kumimoji="1" lang="en-US" altLang="zh-CN" sz="1200" dirty="0">
+                <a:latin typeface="Times New Roman" panose="02020603050405020304" pitchFamily="18" charset="0"/>
+                <a:ea typeface="SimSun" panose="02010600030101010101" pitchFamily="2" charset="-122"/>
+                <a:cs typeface="Times New Roman" panose="02020603050405020304" pitchFamily="18" charset="0"/>
+              </a:rPr>
+              <a:t>tokens</a:t>
+            </a:r>
+            <a:endParaRPr kumimoji="1" lang="zh-CN" altLang="en-US" sz="1200" dirty="0">
+              <a:latin typeface="Times New Roman" panose="02020603050405020304" pitchFamily="18" charset="0"/>
+              <a:ea typeface="SimSun" panose="02010600030101010101" pitchFamily="2" charset="-122"/>
+              <a:cs typeface="Times New Roman" panose="02020603050405020304" pitchFamily="18" charset="0"/>
+            </a:endParaRPr>
+          </a:p>
+        </p:txBody>
+      </p:sp>
+      <p:sp>
+        <p:nvSpPr>
+          <p:cNvPr id="25" name="矩形 24">
+            <a:extLst>
+              <a:ext uri="{FF2B5EF4-FFF2-40B4-BE49-F238E27FC236}">
+                <a16:creationId xmlns:a16="http://schemas.microsoft.com/office/drawing/2014/main" id="{EBDA1D8B-2864-A744-8743-3BD3BFBAEE57}"/>
+              </a:ext>
+            </a:extLst>
+          </p:cNvPr>
+          <p:cNvSpPr/>
+          <p:nvPr/>
+        </p:nvSpPr>
+        <p:spPr>
+          <a:xfrm>
+            <a:off x="4617661" y="2646726"/>
+            <a:ext cx="743267" cy="348499"/>
+          </a:xfrm>
+          <a:prstGeom prst="rect">
+            <a:avLst/>
+          </a:prstGeom>
+          <a:solidFill>
+            <a:srgbClr val="F3F3F3"/>
+          </a:solidFill>
+          <a:ln>
+            <a:noFill/>
+          </a:ln>
+        </p:spPr>
+        <p:style>
+          <a:lnRef idx="2">
+            <a:schemeClr val="accent1">
+              <a:shade val="50000"/>
+            </a:schemeClr>
+          </a:lnRef>
+          <a:fillRef idx="1">
+            <a:schemeClr val="accent1"/>
+          </a:fillRef>
+          <a:effectRef idx="0">
+            <a:schemeClr val="accent1"/>
+          </a:effectRef>
+          <a:fontRef idx="minor">
+            <a:schemeClr val="lt1"/>
+          </a:fontRef>
+        </p:style>
+        <p:txBody>
+          <a:bodyPr rtlCol="0" anchor="ctr"/>
+          <a:lstStyle/>
+          <a:p>
+            <a:pPr algn="ctr"/>
+            <a:endParaRPr kumimoji="1" lang="zh-CN" altLang="en-US" sz="1600"/>
+          </a:p>
+        </p:txBody>
+      </p:sp>
+      <p:sp>
+        <p:nvSpPr>
+          <p:cNvPr id="26" name="文本框 25">
+            <a:extLst>
+              <a:ext uri="{FF2B5EF4-FFF2-40B4-BE49-F238E27FC236}">
+                <a16:creationId xmlns:a16="http://schemas.microsoft.com/office/drawing/2014/main" id="{F6D22EFA-BD02-794B-8DE9-EE6C05A8D300}"/>
+              </a:ext>
+            </a:extLst>
+          </p:cNvPr>
+          <p:cNvSpPr txBox="1"/>
+          <p:nvPr/>
+        </p:nvSpPr>
+        <p:spPr>
+          <a:xfrm>
+            <a:off x="4645926" y="2599092"/>
+            <a:ext cx="587020" cy="461665"/>
+          </a:xfrm>
+          <a:prstGeom prst="rect">
+            <a:avLst/>
+          </a:prstGeom>
+          <a:noFill/>
+        </p:spPr>
+        <p:txBody>
+          <a:bodyPr wrap="none" rtlCol="0">
+            <a:spAutoFit/>
+          </a:bodyPr>
+          <a:lstStyle/>
+          <a:p>
+            <a:r>
+              <a:rPr kumimoji="1" lang="zh-CN" altLang="en-US" sz="1200" dirty="0">
+                <a:latin typeface="Times New Roman" panose="02020603050405020304" pitchFamily="18" charset="0"/>
+                <a:ea typeface="SimSun" panose="02010600030101010101" pitchFamily="2" charset="-122"/>
+                <a:cs typeface="Times New Roman" panose="02020603050405020304" pitchFamily="18" charset="0"/>
+              </a:rPr>
+              <a:t>扩展</a:t>
+            </a:r>
+            <a:endParaRPr kumimoji="1" lang="en-US" altLang="zh-CN" sz="1200" dirty="0">
+              <a:latin typeface="Times New Roman" panose="02020603050405020304" pitchFamily="18" charset="0"/>
+              <a:ea typeface="SimSun" panose="02010600030101010101" pitchFamily="2" charset="-122"/>
+              <a:cs typeface="Times New Roman" panose="02020603050405020304" pitchFamily="18" charset="0"/>
+            </a:endParaRPr>
+          </a:p>
+          <a:p>
+            <a:r>
+              <a:rPr kumimoji="1" lang="en-US" altLang="zh-CN" sz="1200" dirty="0">
+                <a:latin typeface="Times New Roman" panose="02020603050405020304" pitchFamily="18" charset="0"/>
+                <a:ea typeface="SimSun" panose="02010600030101010101" pitchFamily="2" charset="-122"/>
+                <a:cs typeface="Times New Roman" panose="02020603050405020304" pitchFamily="18" charset="0"/>
+              </a:rPr>
+              <a:t>tokens</a:t>
+            </a:r>
+            <a:endParaRPr kumimoji="1" lang="zh-CN" altLang="en-US" sz="1200" dirty="0">
+              <a:latin typeface="Times New Roman" panose="02020603050405020304" pitchFamily="18" charset="0"/>
+              <a:ea typeface="SimSun" panose="02010600030101010101" pitchFamily="2" charset="-122"/>
+              <a:cs typeface="Times New Roman" panose="02020603050405020304" pitchFamily="18" charset="0"/>
+            </a:endParaRPr>
+          </a:p>
+        </p:txBody>
+      </p:sp>
+      <p:sp>
+        <p:nvSpPr>
+          <p:cNvPr id="27" name="矩形 26">
+            <a:extLst>
+              <a:ext uri="{FF2B5EF4-FFF2-40B4-BE49-F238E27FC236}">
+                <a16:creationId xmlns:a16="http://schemas.microsoft.com/office/drawing/2014/main" id="{273C71D7-A5F3-5B45-8DAB-892A65A82E6E}"/>
+              </a:ext>
+            </a:extLst>
+          </p:cNvPr>
+          <p:cNvSpPr/>
+          <p:nvPr/>
+        </p:nvSpPr>
+        <p:spPr>
+          <a:xfrm>
+            <a:off x="3613663" y="2413015"/>
+            <a:ext cx="743267" cy="461665"/>
+          </a:xfrm>
+          <a:prstGeom prst="rect">
+            <a:avLst/>
+          </a:prstGeom>
+          <a:solidFill>
+            <a:srgbClr val="F3F3F3"/>
+          </a:solidFill>
+          <a:ln>
+            <a:noFill/>
+          </a:ln>
+        </p:spPr>
+        <p:style>
+          <a:lnRef idx="2">
+            <a:schemeClr val="accent1">
+              <a:shade val="50000"/>
+            </a:schemeClr>
+          </a:lnRef>
+          <a:fillRef idx="1">
+            <a:schemeClr val="accent1"/>
+          </a:fillRef>
+          <a:effectRef idx="0">
+            <a:schemeClr val="accent1"/>
+          </a:effectRef>
+          <a:fontRef idx="minor">
+            <a:schemeClr val="lt1"/>
+          </a:fontRef>
+        </p:style>
+        <p:txBody>
+          <a:bodyPr rtlCol="0" anchor="ctr"/>
+          <a:lstStyle/>
+          <a:p>
+            <a:pPr algn="ctr"/>
+            <a:endParaRPr kumimoji="1" lang="zh-CN" altLang="en-US" sz="1600"/>
+          </a:p>
+        </p:txBody>
+      </p:sp>
+      <p:sp>
+        <p:nvSpPr>
+          <p:cNvPr id="7" name="文本框 6">
+            <a:extLst>
+              <a:ext uri="{FF2B5EF4-FFF2-40B4-BE49-F238E27FC236}">
+                <a16:creationId xmlns:a16="http://schemas.microsoft.com/office/drawing/2014/main" id="{F5BEDB92-6E78-9A4A-9FF1-8F5B2B5A8F87}"/>
+              </a:ext>
+            </a:extLst>
+          </p:cNvPr>
+          <p:cNvSpPr txBox="1"/>
+          <p:nvPr/>
+        </p:nvSpPr>
+        <p:spPr>
+          <a:xfrm>
+            <a:off x="3596089" y="2555123"/>
+            <a:ext cx="920445" cy="276999"/>
+          </a:xfrm>
+          <a:prstGeom prst="rect">
+            <a:avLst/>
+          </a:prstGeom>
+          <a:noFill/>
+        </p:spPr>
+        <p:txBody>
+          <a:bodyPr wrap="square" rtlCol="0">
+            <a:spAutoFit/>
+          </a:bodyPr>
+          <a:lstStyle/>
+          <a:p>
+            <a:r>
+              <a:rPr kumimoji="1" lang="zh-CN" altLang="en-US" sz="1200" dirty="0">
+                <a:latin typeface="Times New Roman" panose="02020603050405020304" pitchFamily="18" charset="0"/>
+                <a:ea typeface="SimSun" panose="02010600030101010101" pitchFamily="2" charset="-122"/>
+                <a:cs typeface="Times New Roman" panose="02020603050405020304" pitchFamily="18" charset="0"/>
+              </a:rPr>
+              <a:t>旋转</a:t>
+            </a:r>
+            <a:r>
+              <a:rPr kumimoji="1" lang="en-US" altLang="zh-CN" sz="1200" dirty="0">
+                <a:latin typeface="Times New Roman" panose="02020603050405020304" pitchFamily="18" charset="0"/>
+                <a:ea typeface="SimSun" panose="02010600030101010101" pitchFamily="2" charset="-122"/>
+                <a:cs typeface="Times New Roman" panose="02020603050405020304" pitchFamily="18" charset="0"/>
+              </a:rPr>
+              <a:t>&amp;</a:t>
+            </a:r>
+            <a:r>
+              <a:rPr kumimoji="1" lang="zh-CN" altLang="en-US" sz="1200" dirty="0">
+                <a:latin typeface="Times New Roman" panose="02020603050405020304" pitchFamily="18" charset="0"/>
+                <a:ea typeface="SimSun" panose="02010600030101010101" pitchFamily="2" charset="-122"/>
+                <a:cs typeface="Times New Roman" panose="02020603050405020304" pitchFamily="18" charset="0"/>
+              </a:rPr>
+              <a:t>平移</a:t>
+            </a:r>
+          </a:p>
+        </p:txBody>
+      </p:sp>
+      <p:sp>
+        <p:nvSpPr>
+          <p:cNvPr id="28" name="矩形 27">
+            <a:extLst>
+              <a:ext uri="{FF2B5EF4-FFF2-40B4-BE49-F238E27FC236}">
+                <a16:creationId xmlns:a16="http://schemas.microsoft.com/office/drawing/2014/main" id="{C2EA8BAC-8706-EF4B-8DDE-253202A61379}"/>
+              </a:ext>
+            </a:extLst>
+          </p:cNvPr>
+          <p:cNvSpPr/>
+          <p:nvPr/>
+        </p:nvSpPr>
+        <p:spPr>
+          <a:xfrm>
+            <a:off x="5526231" y="2665587"/>
+            <a:ext cx="696327" cy="329638"/>
+          </a:xfrm>
+          <a:prstGeom prst="rect">
+            <a:avLst/>
+          </a:prstGeom>
+          <a:solidFill>
+            <a:srgbClr val="F3F3F3"/>
+          </a:solidFill>
+          <a:ln>
+            <a:noFill/>
+          </a:ln>
+        </p:spPr>
+        <p:style>
+          <a:lnRef idx="2">
+            <a:schemeClr val="accent1">
+              <a:shade val="50000"/>
+            </a:schemeClr>
+          </a:lnRef>
+          <a:fillRef idx="1">
+            <a:schemeClr val="accent1"/>
+          </a:fillRef>
+          <a:effectRef idx="0">
+            <a:schemeClr val="accent1"/>
+          </a:effectRef>
+          <a:fontRef idx="minor">
+            <a:schemeClr val="lt1"/>
+          </a:fontRef>
+        </p:style>
+        <p:txBody>
+          <a:bodyPr rtlCol="0" anchor="ctr"/>
+          <a:lstStyle/>
+          <a:p>
+            <a:pPr algn="ctr"/>
+            <a:endParaRPr kumimoji="1" lang="zh-CN" altLang="en-US" sz="1600"/>
+          </a:p>
+        </p:txBody>
+      </p:sp>
+      <p:sp>
+        <p:nvSpPr>
+          <p:cNvPr id="9" name="文本框 8">
+            <a:extLst>
+              <a:ext uri="{FF2B5EF4-FFF2-40B4-BE49-F238E27FC236}">
+                <a16:creationId xmlns:a16="http://schemas.microsoft.com/office/drawing/2014/main" id="{27A2735F-414D-0C49-A6EB-69026F5DFE43}"/>
+              </a:ext>
+            </a:extLst>
+          </p:cNvPr>
+          <p:cNvSpPr txBox="1"/>
+          <p:nvPr/>
+        </p:nvSpPr>
+        <p:spPr>
+          <a:xfrm>
+            <a:off x="5584929" y="2599092"/>
+            <a:ext cx="492443" cy="461665"/>
+          </a:xfrm>
+          <a:prstGeom prst="rect">
+            <a:avLst/>
+          </a:prstGeom>
+          <a:noFill/>
+        </p:spPr>
+        <p:txBody>
+          <a:bodyPr wrap="none" rtlCol="0">
+            <a:spAutoFit/>
+          </a:bodyPr>
+          <a:lstStyle/>
+          <a:p>
+            <a:r>
+              <a:rPr kumimoji="1" lang="zh-CN" altLang="en-US" sz="1200" dirty="0">
+                <a:latin typeface="Times New Roman" panose="02020603050405020304" pitchFamily="18" charset="0"/>
+                <a:ea typeface="SimSun" panose="02010600030101010101" pitchFamily="2" charset="-122"/>
+                <a:cs typeface="Times New Roman" panose="02020603050405020304" pitchFamily="18" charset="0"/>
+              </a:rPr>
+              <a:t>边缘</a:t>
+            </a:r>
+            <a:endParaRPr kumimoji="1" lang="en-US" altLang="zh-CN" sz="1200" dirty="0">
+              <a:latin typeface="Times New Roman" panose="02020603050405020304" pitchFamily="18" charset="0"/>
+              <a:ea typeface="SimSun" panose="02010600030101010101" pitchFamily="2" charset="-122"/>
+              <a:cs typeface="Times New Roman" panose="02020603050405020304" pitchFamily="18" charset="0"/>
+            </a:endParaRPr>
+          </a:p>
+          <a:p>
+            <a:r>
+              <a:rPr kumimoji="1" lang="zh-CN" altLang="en-US" sz="1200" dirty="0">
+                <a:latin typeface="Times New Roman" panose="02020603050405020304" pitchFamily="18" charset="0"/>
+                <a:ea typeface="SimSun" panose="02010600030101010101" pitchFamily="2" charset="-122"/>
+                <a:cs typeface="Times New Roman" panose="02020603050405020304" pitchFamily="18" charset="0"/>
+              </a:rPr>
+              <a:t>查询</a:t>
+            </a:r>
+          </a:p>
+        </p:txBody>
+      </p:sp>
+      <p:sp>
+        <p:nvSpPr>
+          <p:cNvPr id="29" name="矩形 28">
+            <a:extLst>
+              <a:ext uri="{FF2B5EF4-FFF2-40B4-BE49-F238E27FC236}">
+                <a16:creationId xmlns:a16="http://schemas.microsoft.com/office/drawing/2014/main" id="{DF4A36F0-15B7-2140-B66D-A25B0208A411}"/>
+              </a:ext>
+            </a:extLst>
+          </p:cNvPr>
+          <p:cNvSpPr/>
+          <p:nvPr/>
+        </p:nvSpPr>
+        <p:spPr>
+          <a:xfrm>
+            <a:off x="7552124" y="2638545"/>
+            <a:ext cx="629663" cy="329638"/>
+          </a:xfrm>
+          <a:prstGeom prst="rect">
+            <a:avLst/>
+          </a:prstGeom>
+          <a:solidFill>
+            <a:srgbClr val="F3F3F3"/>
+          </a:solidFill>
+          <a:ln>
+            <a:noFill/>
+          </a:ln>
+        </p:spPr>
+        <p:style>
+          <a:lnRef idx="2">
+            <a:schemeClr val="accent1">
+              <a:shade val="50000"/>
+            </a:schemeClr>
+          </a:lnRef>
+          <a:fillRef idx="1">
+            <a:schemeClr val="accent1"/>
+          </a:fillRef>
+          <a:effectRef idx="0">
+            <a:schemeClr val="accent1"/>
+          </a:effectRef>
+          <a:fontRef idx="minor">
+            <a:schemeClr val="lt1"/>
+          </a:fontRef>
+        </p:style>
+        <p:txBody>
+          <a:bodyPr rtlCol="0" anchor="ctr"/>
+          <a:lstStyle/>
+          <a:p>
+            <a:pPr algn="ctr"/>
+            <a:endParaRPr kumimoji="1" lang="zh-CN" altLang="en-US" sz="1600"/>
+          </a:p>
+        </p:txBody>
+      </p:sp>
+      <p:sp>
+        <p:nvSpPr>
+          <p:cNvPr id="11" name="文本框 10">
+            <a:extLst>
+              <a:ext uri="{FF2B5EF4-FFF2-40B4-BE49-F238E27FC236}">
+                <a16:creationId xmlns:a16="http://schemas.microsoft.com/office/drawing/2014/main" id="{CFAA7FEB-2B6D-424B-A1FA-F35B43EA730D}"/>
+              </a:ext>
+            </a:extLst>
+          </p:cNvPr>
+          <p:cNvSpPr txBox="1"/>
+          <p:nvPr/>
+        </p:nvSpPr>
+        <p:spPr>
+          <a:xfrm>
+            <a:off x="7604189" y="2605150"/>
+            <a:ext cx="587020" cy="461665"/>
+          </a:xfrm>
+          <a:prstGeom prst="rect">
+            <a:avLst/>
+          </a:prstGeom>
+          <a:noFill/>
+        </p:spPr>
+        <p:txBody>
+          <a:bodyPr wrap="none" rtlCol="0">
+            <a:spAutoFit/>
+          </a:bodyPr>
+          <a:lstStyle/>
+          <a:p>
+            <a:r>
+              <a:rPr kumimoji="1" lang="zh-CN" altLang="en-US" sz="1200" dirty="0">
+                <a:latin typeface="Times New Roman" panose="02020603050405020304" pitchFamily="18" charset="0"/>
+                <a:ea typeface="SimSun" panose="02010600030101010101" pitchFamily="2" charset="-122"/>
+                <a:cs typeface="Times New Roman" panose="02020603050405020304" pitchFamily="18" charset="0"/>
+              </a:rPr>
+              <a:t>边缘</a:t>
+            </a:r>
+            <a:endParaRPr kumimoji="1" lang="en-US" altLang="zh-CN" sz="1200" dirty="0">
+              <a:latin typeface="Times New Roman" panose="02020603050405020304" pitchFamily="18" charset="0"/>
+              <a:ea typeface="SimSun" panose="02010600030101010101" pitchFamily="2" charset="-122"/>
+              <a:cs typeface="Times New Roman" panose="02020603050405020304" pitchFamily="18" charset="0"/>
+            </a:endParaRPr>
+          </a:p>
+          <a:p>
+            <a:r>
+              <a:rPr kumimoji="1" lang="en-US" altLang="zh-CN" sz="1200" dirty="0">
+                <a:latin typeface="Times New Roman" panose="02020603050405020304" pitchFamily="18" charset="0"/>
+                <a:ea typeface="SimSun" panose="02010600030101010101" pitchFamily="2" charset="-122"/>
+                <a:cs typeface="Times New Roman" panose="02020603050405020304" pitchFamily="18" charset="0"/>
+              </a:rPr>
+              <a:t>tokens</a:t>
+            </a:r>
+            <a:endParaRPr kumimoji="1" lang="zh-CN" altLang="en-US" sz="1200" dirty="0">
+              <a:latin typeface="Times New Roman" panose="02020603050405020304" pitchFamily="18" charset="0"/>
+              <a:ea typeface="SimSun" panose="02010600030101010101" pitchFamily="2" charset="-122"/>
+              <a:cs typeface="Times New Roman" panose="02020603050405020304" pitchFamily="18" charset="0"/>
+            </a:endParaRPr>
+          </a:p>
+        </p:txBody>
+      </p:sp>
+      <p:sp>
+        <p:nvSpPr>
+          <p:cNvPr id="30" name="矩形 29">
+            <a:extLst>
+              <a:ext uri="{FF2B5EF4-FFF2-40B4-BE49-F238E27FC236}">
+                <a16:creationId xmlns:a16="http://schemas.microsoft.com/office/drawing/2014/main" id="{5828380B-1C71-5043-AC0D-0F4D086EA67B}"/>
+              </a:ext>
+            </a:extLst>
+          </p:cNvPr>
+          <p:cNvSpPr/>
+          <p:nvPr/>
+        </p:nvSpPr>
+        <p:spPr>
+          <a:xfrm>
+            <a:off x="804591" y="5572447"/>
+            <a:ext cx="916633" cy="185680"/>
+          </a:xfrm>
+          <a:prstGeom prst="rect">
+            <a:avLst/>
+          </a:prstGeom>
+          <a:solidFill>
+            <a:srgbClr val="F3F3F3"/>
+          </a:solidFill>
+          <a:ln>
+            <a:noFill/>
+          </a:ln>
+        </p:spPr>
+        <p:style>
+          <a:lnRef idx="2">
+            <a:schemeClr val="accent1">
+              <a:shade val="50000"/>
+            </a:schemeClr>
+          </a:lnRef>
+          <a:fillRef idx="1">
+            <a:schemeClr val="accent1"/>
+          </a:fillRef>
+          <a:effectRef idx="0">
+            <a:schemeClr val="accent1"/>
+          </a:effectRef>
+          <a:fontRef idx="minor">
+            <a:schemeClr val="lt1"/>
+          </a:fontRef>
+        </p:style>
+        <p:txBody>
+          <a:bodyPr rtlCol="0" anchor="ctr"/>
+          <a:lstStyle/>
+          <a:p>
+            <a:pPr algn="ctr"/>
+            <a:endParaRPr kumimoji="1" lang="zh-CN" altLang="en-US" sz="1600"/>
+          </a:p>
+        </p:txBody>
+      </p:sp>
+      <p:sp>
+        <p:nvSpPr>
+          <p:cNvPr id="22" name="文本框 21">
+            <a:extLst>
+              <a:ext uri="{FF2B5EF4-FFF2-40B4-BE49-F238E27FC236}">
+                <a16:creationId xmlns:a16="http://schemas.microsoft.com/office/drawing/2014/main" id="{2BAB3F6A-4AEC-A34E-B42F-F9A204B8D469}"/>
+              </a:ext>
+            </a:extLst>
+          </p:cNvPr>
+          <p:cNvSpPr txBox="1"/>
+          <p:nvPr/>
+        </p:nvSpPr>
+        <p:spPr>
+          <a:xfrm>
+            <a:off x="906820" y="5497659"/>
+            <a:ext cx="800219" cy="276999"/>
+          </a:xfrm>
+          <a:prstGeom prst="rect">
+            <a:avLst/>
+          </a:prstGeom>
+          <a:noFill/>
+        </p:spPr>
+        <p:txBody>
+          <a:bodyPr wrap="none" rtlCol="0">
+            <a:spAutoFit/>
+          </a:bodyPr>
+          <a:lstStyle/>
+          <a:p>
+            <a:r>
+              <a:rPr kumimoji="1" lang="zh-CN" altLang="en-US" sz="1200" dirty="0">
+                <a:latin typeface="Times New Roman" panose="02020603050405020304" pitchFamily="18" charset="0"/>
+                <a:ea typeface="SimSun" panose="02010600030101010101" pitchFamily="2" charset="-122"/>
+                <a:cs typeface="Times New Roman" panose="02020603050405020304" pitchFamily="18" charset="0"/>
+              </a:rPr>
+              <a:t>输入图片</a:t>
+            </a:r>
+          </a:p>
+        </p:txBody>
+      </p:sp>
+      <p:sp>
+        <p:nvSpPr>
+          <p:cNvPr id="31" name="矩形 30">
+            <a:extLst>
+              <a:ext uri="{FF2B5EF4-FFF2-40B4-BE49-F238E27FC236}">
+                <a16:creationId xmlns:a16="http://schemas.microsoft.com/office/drawing/2014/main" id="{79CB51B7-CD67-4C47-B588-FD3B2EB47885}"/>
+              </a:ext>
+            </a:extLst>
+          </p:cNvPr>
+          <p:cNvSpPr/>
+          <p:nvPr/>
+        </p:nvSpPr>
+        <p:spPr>
+          <a:xfrm>
+            <a:off x="2571777" y="4990924"/>
+            <a:ext cx="763094" cy="386221"/>
+          </a:xfrm>
+          <a:prstGeom prst="rect">
+            <a:avLst/>
+          </a:prstGeom>
+          <a:solidFill>
+            <a:srgbClr val="F3F3F3"/>
+          </a:solidFill>
+          <a:ln>
+            <a:noFill/>
+          </a:ln>
+        </p:spPr>
+        <p:style>
+          <a:lnRef idx="2">
+            <a:schemeClr val="accent1">
+              <a:shade val="50000"/>
+            </a:schemeClr>
+          </a:lnRef>
+          <a:fillRef idx="1">
+            <a:schemeClr val="accent1"/>
+          </a:fillRef>
+          <a:effectRef idx="0">
+            <a:schemeClr val="accent1"/>
+          </a:effectRef>
+          <a:fontRef idx="minor">
+            <a:schemeClr val="lt1"/>
+          </a:fontRef>
+        </p:style>
+        <p:txBody>
+          <a:bodyPr rtlCol="0" anchor="ctr"/>
+          <a:lstStyle/>
+          <a:p>
+            <a:pPr algn="ctr"/>
+            <a:endParaRPr kumimoji="1" lang="zh-CN" altLang="en-US" sz="1600"/>
+          </a:p>
+        </p:txBody>
+      </p:sp>
+      <p:sp>
+        <p:nvSpPr>
+          <p:cNvPr id="32" name="矩形 31">
+            <a:extLst>
+              <a:ext uri="{FF2B5EF4-FFF2-40B4-BE49-F238E27FC236}">
+                <a16:creationId xmlns:a16="http://schemas.microsoft.com/office/drawing/2014/main" id="{0233F1B4-7467-2B46-A453-0EFD535AC892}"/>
+              </a:ext>
+            </a:extLst>
+          </p:cNvPr>
+          <p:cNvSpPr/>
+          <p:nvPr/>
+        </p:nvSpPr>
+        <p:spPr>
+          <a:xfrm>
+            <a:off x="4607747" y="5340317"/>
+            <a:ext cx="763094" cy="386221"/>
+          </a:xfrm>
+          <a:prstGeom prst="rect">
+            <a:avLst/>
+          </a:prstGeom>
+          <a:solidFill>
+            <a:srgbClr val="F3F3F3"/>
+          </a:solidFill>
+          <a:ln>
+            <a:noFill/>
+          </a:ln>
+        </p:spPr>
+        <p:style>
+          <a:lnRef idx="2">
+            <a:schemeClr val="accent1">
+              <a:shade val="50000"/>
+            </a:schemeClr>
+          </a:lnRef>
+          <a:fillRef idx="1">
+            <a:schemeClr val="accent1"/>
+          </a:fillRef>
+          <a:effectRef idx="0">
+            <a:schemeClr val="accent1"/>
+          </a:effectRef>
+          <a:fontRef idx="minor">
+            <a:schemeClr val="lt1"/>
+          </a:fontRef>
+        </p:style>
+        <p:txBody>
+          <a:bodyPr rtlCol="0" anchor="ctr"/>
+          <a:lstStyle/>
+          <a:p>
+            <a:pPr algn="ctr"/>
+            <a:endParaRPr kumimoji="1" lang="zh-CN" altLang="en-US" sz="1600"/>
+          </a:p>
+        </p:txBody>
+      </p:sp>
+      <p:sp>
+        <p:nvSpPr>
+          <p:cNvPr id="33" name="矩形 32">
+            <a:extLst>
+              <a:ext uri="{FF2B5EF4-FFF2-40B4-BE49-F238E27FC236}">
+                <a16:creationId xmlns:a16="http://schemas.microsoft.com/office/drawing/2014/main" id="{5B2EF1F5-783B-7546-BAA2-6C254F5966DB}"/>
+              </a:ext>
+            </a:extLst>
+          </p:cNvPr>
+          <p:cNvSpPr/>
+          <p:nvPr/>
+        </p:nvSpPr>
+        <p:spPr>
+          <a:xfrm>
+            <a:off x="6401900" y="5225319"/>
+            <a:ext cx="763094" cy="386221"/>
+          </a:xfrm>
+          <a:prstGeom prst="rect">
+            <a:avLst/>
+          </a:prstGeom>
+          <a:solidFill>
+            <a:srgbClr val="F3F3F3"/>
+          </a:solidFill>
+          <a:ln>
+            <a:noFill/>
+          </a:ln>
+        </p:spPr>
+        <p:style>
+          <a:lnRef idx="2">
+            <a:schemeClr val="accent1">
+              <a:shade val="50000"/>
+            </a:schemeClr>
+          </a:lnRef>
+          <a:fillRef idx="1">
+            <a:schemeClr val="accent1"/>
+          </a:fillRef>
+          <a:effectRef idx="0">
+            <a:schemeClr val="accent1"/>
+          </a:effectRef>
+          <a:fontRef idx="minor">
+            <a:schemeClr val="lt1"/>
+          </a:fontRef>
+        </p:style>
+        <p:txBody>
+          <a:bodyPr rtlCol="0" anchor="ctr"/>
+          <a:lstStyle/>
+          <a:p>
+            <a:pPr algn="ctr"/>
+            <a:endParaRPr kumimoji="1" lang="zh-CN" altLang="en-US" sz="1600"/>
+          </a:p>
+        </p:txBody>
+      </p:sp>
+      <p:sp>
+        <p:nvSpPr>
+          <p:cNvPr id="18" name="文本框 17">
+            <a:extLst>
+              <a:ext uri="{FF2B5EF4-FFF2-40B4-BE49-F238E27FC236}">
+                <a16:creationId xmlns:a16="http://schemas.microsoft.com/office/drawing/2014/main" id="{4F92D593-FC85-6448-9289-1E713D5E76AF}"/>
+              </a:ext>
+            </a:extLst>
+          </p:cNvPr>
+          <p:cNvSpPr txBox="1"/>
+          <p:nvPr/>
+        </p:nvSpPr>
+        <p:spPr>
+          <a:xfrm>
+            <a:off x="4583886" y="5340317"/>
+            <a:ext cx="894797" cy="276999"/>
+          </a:xfrm>
+          <a:prstGeom prst="rect">
+            <a:avLst/>
+          </a:prstGeom>
+          <a:noFill/>
+        </p:spPr>
+        <p:txBody>
+          <a:bodyPr wrap="none" rtlCol="0">
+            <a:spAutoFit/>
+          </a:bodyPr>
+          <a:lstStyle/>
+          <a:p>
+            <a:r>
+              <a:rPr kumimoji="1" lang="zh-CN" altLang="en-US" sz="1200" dirty="0">
+                <a:latin typeface="Times New Roman" panose="02020603050405020304" pitchFamily="18" charset="0"/>
+                <a:ea typeface="SimSun" panose="02010600030101010101" pitchFamily="2" charset="-122"/>
+                <a:cs typeface="Times New Roman" panose="02020603050405020304" pitchFamily="18" charset="0"/>
+              </a:rPr>
+              <a:t>视觉</a:t>
+            </a:r>
+            <a:r>
+              <a:rPr kumimoji="1" lang="en-US" altLang="zh-CN" sz="1200" dirty="0">
+                <a:latin typeface="Times New Roman" panose="02020603050405020304" pitchFamily="18" charset="0"/>
+                <a:ea typeface="SimSun" panose="02010600030101010101" pitchFamily="2" charset="-122"/>
+                <a:cs typeface="Times New Roman" panose="02020603050405020304" pitchFamily="18" charset="0"/>
+              </a:rPr>
+              <a:t>tokens</a:t>
+            </a:r>
+            <a:endParaRPr kumimoji="1" lang="zh-CN" altLang="en-US" sz="1200" dirty="0">
+              <a:latin typeface="Times New Roman" panose="02020603050405020304" pitchFamily="18" charset="0"/>
+              <a:ea typeface="SimSun" panose="02010600030101010101" pitchFamily="2" charset="-122"/>
+              <a:cs typeface="Times New Roman" panose="02020603050405020304" pitchFamily="18" charset="0"/>
+            </a:endParaRPr>
+          </a:p>
+        </p:txBody>
+      </p:sp>
+      <p:sp>
+        <p:nvSpPr>
+          <p:cNvPr id="20" name="文本框 19">
+            <a:extLst>
+              <a:ext uri="{FF2B5EF4-FFF2-40B4-BE49-F238E27FC236}">
+                <a16:creationId xmlns:a16="http://schemas.microsoft.com/office/drawing/2014/main" id="{63B8BFCC-5CC1-A842-9FEB-5802A130EC0C}"/>
+              </a:ext>
+            </a:extLst>
+          </p:cNvPr>
+          <p:cNvSpPr txBox="1"/>
+          <p:nvPr/>
+        </p:nvSpPr>
+        <p:spPr>
+          <a:xfrm>
+            <a:off x="2618958" y="5017365"/>
+            <a:ext cx="800219" cy="276999"/>
+          </a:xfrm>
+          <a:prstGeom prst="rect">
+            <a:avLst/>
+          </a:prstGeom>
+          <a:noFill/>
+        </p:spPr>
+        <p:txBody>
+          <a:bodyPr wrap="none" rtlCol="0">
+            <a:spAutoFit/>
+          </a:bodyPr>
+          <a:lstStyle/>
+          <a:p>
+            <a:r>
+              <a:rPr kumimoji="1" lang="zh-CN" altLang="en-US" sz="1200" dirty="0">
+                <a:latin typeface="Times New Roman" panose="02020603050405020304" pitchFamily="18" charset="0"/>
+                <a:ea typeface="SimSun" panose="02010600030101010101" pitchFamily="2" charset="-122"/>
+                <a:cs typeface="Times New Roman" panose="02020603050405020304" pitchFamily="18" charset="0"/>
+              </a:rPr>
+              <a:t>图片特征</a:t>
+            </a:r>
+          </a:p>
+        </p:txBody>
+      </p:sp>
+      <p:sp>
+        <p:nvSpPr>
+          <p:cNvPr id="17" name="文本框 16">
+            <a:extLst>
+              <a:ext uri="{FF2B5EF4-FFF2-40B4-BE49-F238E27FC236}">
+                <a16:creationId xmlns:a16="http://schemas.microsoft.com/office/drawing/2014/main" id="{8E56D0E3-FE37-6747-A81F-FA2AA1377035}"/>
+              </a:ext>
+            </a:extLst>
+          </p:cNvPr>
+          <p:cNvSpPr txBox="1"/>
+          <p:nvPr/>
+        </p:nvSpPr>
+        <p:spPr>
+          <a:xfrm>
+            <a:off x="6301707" y="5209459"/>
+            <a:ext cx="954107" cy="276999"/>
+          </a:xfrm>
+          <a:prstGeom prst="rect">
+            <a:avLst/>
+          </a:prstGeom>
+          <a:noFill/>
+        </p:spPr>
+        <p:txBody>
+          <a:bodyPr wrap="none" rtlCol="0">
+            <a:spAutoFit/>
+          </a:bodyPr>
+          <a:lstStyle/>
+          <a:p>
+            <a:r>
+              <a:rPr kumimoji="1" lang="zh-CN" altLang="en-US" sz="1200" dirty="0">
+                <a:latin typeface="Times New Roman" panose="02020603050405020304" pitchFamily="18" charset="0"/>
+                <a:ea typeface="SimSun" panose="02010600030101010101" pitchFamily="2" charset="-122"/>
+                <a:cs typeface="Times New Roman" panose="02020603050405020304" pitchFamily="18" charset="0"/>
+              </a:rPr>
+              <a:t>相似度矩阵</a:t>
+            </a:r>
+          </a:p>
+        </p:txBody>
+      </p:sp>
+      <p:sp>
+        <p:nvSpPr>
+          <p:cNvPr id="34" name="矩形 33">
+            <a:extLst>
+              <a:ext uri="{FF2B5EF4-FFF2-40B4-BE49-F238E27FC236}">
+                <a16:creationId xmlns:a16="http://schemas.microsoft.com/office/drawing/2014/main" id="{E81885F6-4038-4647-85AB-8BFF01E9C946}"/>
+              </a:ext>
+            </a:extLst>
+          </p:cNvPr>
+          <p:cNvSpPr/>
+          <p:nvPr/>
+        </p:nvSpPr>
+        <p:spPr>
+          <a:xfrm>
+            <a:off x="1777792" y="1258290"/>
+            <a:ext cx="397643" cy="1030698"/>
+          </a:xfrm>
+          <a:prstGeom prst="rect">
+            <a:avLst/>
+          </a:prstGeom>
+          <a:solidFill>
+            <a:srgbClr val="FDE5CD"/>
+          </a:solidFill>
+          <a:ln>
+            <a:noFill/>
+          </a:ln>
+        </p:spPr>
+        <p:style>
+          <a:lnRef idx="2">
+            <a:schemeClr val="accent1">
+              <a:shade val="50000"/>
+            </a:schemeClr>
+          </a:lnRef>
+          <a:fillRef idx="1">
+            <a:schemeClr val="accent1"/>
+          </a:fillRef>
+          <a:effectRef idx="0">
+            <a:schemeClr val="accent1"/>
+          </a:effectRef>
+          <a:fontRef idx="minor">
+            <a:schemeClr val="lt1"/>
+          </a:fontRef>
+        </p:style>
+        <p:txBody>
+          <a:bodyPr rtlCol="0" anchor="ctr"/>
+          <a:lstStyle/>
+          <a:p>
+            <a:pPr algn="ctr"/>
+            <a:endParaRPr kumimoji="1" lang="zh-CN" altLang="en-US" sz="1600"/>
+          </a:p>
+        </p:txBody>
+      </p:sp>
+      <p:sp>
+        <p:nvSpPr>
+          <p:cNvPr id="5" name="文本框 4">
+            <a:extLst>
+              <a:ext uri="{FF2B5EF4-FFF2-40B4-BE49-F238E27FC236}">
+                <a16:creationId xmlns:a16="http://schemas.microsoft.com/office/drawing/2014/main" id="{336390E6-9B20-1045-B26A-7D0B6D19131C}"/>
+              </a:ext>
+            </a:extLst>
+          </p:cNvPr>
+          <p:cNvSpPr txBox="1"/>
+          <p:nvPr/>
+        </p:nvSpPr>
+        <p:spPr>
+          <a:xfrm rot="5400000">
+            <a:off x="1527952" y="1578718"/>
+            <a:ext cx="897321" cy="523220"/>
+          </a:xfrm>
+          <a:prstGeom prst="rect">
+            <a:avLst/>
+          </a:prstGeom>
+          <a:noFill/>
+        </p:spPr>
+        <p:txBody>
+          <a:bodyPr wrap="square" rtlCol="0">
+            <a:spAutoFit/>
+          </a:bodyPr>
+          <a:lstStyle/>
+          <a:p>
+            <a:pPr algn="ctr"/>
+            <a:r>
+              <a:rPr kumimoji="1" lang="zh-CN" altLang="en-US" sz="1400" b="1" dirty="0">
+                <a:latin typeface="Times New Roman" panose="02020603050405020304" pitchFamily="18" charset="0"/>
+                <a:ea typeface="SimSun" panose="02010600030101010101" pitchFamily="2" charset="-122"/>
+                <a:cs typeface="Times New Roman" panose="02020603050405020304" pitchFamily="18" charset="0"/>
+              </a:rPr>
+              <a:t>版型</a:t>
+            </a:r>
+            <a:endParaRPr kumimoji="1" lang="en-US" altLang="zh-CN" sz="1400" b="1" dirty="0">
+              <a:latin typeface="Times New Roman" panose="02020603050405020304" pitchFamily="18" charset="0"/>
+              <a:ea typeface="SimSun" panose="02010600030101010101" pitchFamily="2" charset="-122"/>
+              <a:cs typeface="Times New Roman" panose="02020603050405020304" pitchFamily="18" charset="0"/>
+            </a:endParaRPr>
+          </a:p>
+          <a:p>
+            <a:pPr algn="ctr"/>
+            <a:r>
+              <a:rPr kumimoji="1" lang="zh-CN" altLang="en-US" sz="1400" b="1" dirty="0">
+                <a:latin typeface="Times New Roman" panose="02020603050405020304" pitchFamily="18" charset="0"/>
+                <a:ea typeface="SimSun" panose="02010600030101010101" pitchFamily="2" charset="-122"/>
+                <a:cs typeface="Times New Roman" panose="02020603050405020304" pitchFamily="18" charset="0"/>
+              </a:rPr>
+              <a:t>编码器</a:t>
+            </a:r>
+          </a:p>
+        </p:txBody>
+      </p:sp>
+      <p:sp>
+        <p:nvSpPr>
+          <p:cNvPr id="35" name="矩形 34">
+            <a:extLst>
+              <a:ext uri="{FF2B5EF4-FFF2-40B4-BE49-F238E27FC236}">
+                <a16:creationId xmlns:a16="http://schemas.microsoft.com/office/drawing/2014/main" id="{728A6A7A-8B2B-1046-931E-0FCA409CB1FF}"/>
+              </a:ext>
+            </a:extLst>
+          </p:cNvPr>
+          <p:cNvSpPr/>
+          <p:nvPr/>
+        </p:nvSpPr>
+        <p:spPr>
+          <a:xfrm rot="5400000">
+            <a:off x="3561182" y="1625114"/>
+            <a:ext cx="690791" cy="310776"/>
+          </a:xfrm>
+          <a:prstGeom prst="rect">
+            <a:avLst/>
+          </a:prstGeom>
+          <a:solidFill>
+            <a:srgbClr val="D6DDE4"/>
+          </a:solidFill>
+          <a:ln>
+            <a:noFill/>
+          </a:ln>
+        </p:spPr>
+        <p:style>
+          <a:lnRef idx="2">
+            <a:schemeClr val="accent1">
+              <a:shade val="50000"/>
+            </a:schemeClr>
+          </a:lnRef>
+          <a:fillRef idx="1">
+            <a:schemeClr val="accent1"/>
+          </a:fillRef>
+          <a:effectRef idx="0">
+            <a:schemeClr val="accent1"/>
+          </a:effectRef>
+          <a:fontRef idx="minor">
+            <a:schemeClr val="lt1"/>
+          </a:fontRef>
+        </p:style>
+        <p:txBody>
+          <a:bodyPr rtlCol="0" anchor="ctr"/>
+          <a:lstStyle/>
+          <a:p>
+            <a:pPr algn="ctr"/>
+            <a:endParaRPr kumimoji="1" lang="zh-CN" altLang="en-US" sz="1600"/>
+          </a:p>
+        </p:txBody>
+      </p:sp>
+      <p:sp>
+        <p:nvSpPr>
+          <p:cNvPr id="8" name="文本框 7">
+            <a:extLst>
+              <a:ext uri="{FF2B5EF4-FFF2-40B4-BE49-F238E27FC236}">
+                <a16:creationId xmlns:a16="http://schemas.microsoft.com/office/drawing/2014/main" id="{C5C38FC5-885D-4346-9F50-36853DBC3F22}"/>
+              </a:ext>
+            </a:extLst>
+          </p:cNvPr>
+          <p:cNvSpPr txBox="1"/>
+          <p:nvPr/>
+        </p:nvSpPr>
+        <p:spPr>
+          <a:xfrm rot="5400000">
+            <a:off x="3654824" y="1686439"/>
+            <a:ext cx="543739" cy="307777"/>
+          </a:xfrm>
+          <a:prstGeom prst="rect">
+            <a:avLst/>
+          </a:prstGeom>
+          <a:noFill/>
+        </p:spPr>
+        <p:txBody>
+          <a:bodyPr wrap="none" rtlCol="0">
+            <a:spAutoFit/>
+          </a:bodyPr>
+          <a:lstStyle/>
+          <a:p>
+            <a:r>
+              <a:rPr kumimoji="1" lang="zh-CN" altLang="en-US" sz="1400" b="1" dirty="0">
+                <a:latin typeface="Times New Roman" panose="02020603050405020304" pitchFamily="18" charset="0"/>
+                <a:ea typeface="SimSun" panose="02010600030101010101" pitchFamily="2" charset="-122"/>
+                <a:cs typeface="Times New Roman" panose="02020603050405020304" pitchFamily="18" charset="0"/>
+              </a:rPr>
+              <a:t>扩展</a:t>
+            </a:r>
+          </a:p>
+        </p:txBody>
+      </p:sp>
+      <p:sp>
+        <p:nvSpPr>
+          <p:cNvPr id="36" name="矩形 35">
+            <a:extLst>
+              <a:ext uri="{FF2B5EF4-FFF2-40B4-BE49-F238E27FC236}">
+                <a16:creationId xmlns:a16="http://schemas.microsoft.com/office/drawing/2014/main" id="{66485E92-A025-854F-9EF0-1E186852CDCC}"/>
+              </a:ext>
+            </a:extLst>
+          </p:cNvPr>
+          <p:cNvSpPr/>
+          <p:nvPr/>
+        </p:nvSpPr>
+        <p:spPr>
+          <a:xfrm>
+            <a:off x="6683489" y="1391666"/>
+            <a:ext cx="481506" cy="897321"/>
+          </a:xfrm>
+          <a:prstGeom prst="rect">
+            <a:avLst/>
+          </a:prstGeom>
+          <a:solidFill>
+            <a:srgbClr val="FFF3CC"/>
+          </a:solidFill>
+          <a:ln>
+            <a:noFill/>
+          </a:ln>
+        </p:spPr>
+        <p:style>
+          <a:lnRef idx="2">
+            <a:schemeClr val="accent1">
+              <a:shade val="50000"/>
+            </a:schemeClr>
+          </a:lnRef>
+          <a:fillRef idx="1">
+            <a:schemeClr val="accent1"/>
+          </a:fillRef>
+          <a:effectRef idx="0">
+            <a:schemeClr val="accent1"/>
+          </a:effectRef>
+          <a:fontRef idx="minor">
+            <a:schemeClr val="lt1"/>
+          </a:fontRef>
+        </p:style>
+        <p:txBody>
+          <a:bodyPr rtlCol="0" anchor="ctr"/>
+          <a:lstStyle/>
+          <a:p>
+            <a:pPr algn="ctr"/>
+            <a:endParaRPr kumimoji="1" lang="zh-CN" altLang="en-US" sz="1600"/>
+          </a:p>
+        </p:txBody>
+      </p:sp>
+      <p:sp>
+        <p:nvSpPr>
+          <p:cNvPr id="10" name="文本框 9">
+            <a:extLst>
+              <a:ext uri="{FF2B5EF4-FFF2-40B4-BE49-F238E27FC236}">
+                <a16:creationId xmlns:a16="http://schemas.microsoft.com/office/drawing/2014/main" id="{AE84CF7F-8FD7-7F4F-82F9-D6D0AB2EA516}"/>
+              </a:ext>
+            </a:extLst>
+          </p:cNvPr>
+          <p:cNvSpPr txBox="1"/>
+          <p:nvPr/>
+        </p:nvSpPr>
+        <p:spPr>
+          <a:xfrm rot="5400000">
+            <a:off x="6602077" y="1578716"/>
+            <a:ext cx="723275" cy="523220"/>
+          </a:xfrm>
+          <a:prstGeom prst="rect">
+            <a:avLst/>
+          </a:prstGeom>
+          <a:noFill/>
+        </p:spPr>
+        <p:txBody>
+          <a:bodyPr wrap="none" rtlCol="0">
+            <a:spAutoFit/>
+          </a:bodyPr>
+          <a:lstStyle/>
+          <a:p>
+            <a:pPr algn="ctr"/>
+            <a:r>
+              <a:rPr kumimoji="1" lang="zh-CN" altLang="en-US" sz="1400" b="1" dirty="0">
+                <a:latin typeface="Times New Roman" panose="02020603050405020304" pitchFamily="18" charset="0"/>
+                <a:ea typeface="SimSun" panose="02010600030101010101" pitchFamily="2" charset="-122"/>
+                <a:cs typeface="Times New Roman" panose="02020603050405020304" pitchFamily="18" charset="0"/>
+              </a:rPr>
+              <a:t>边缘</a:t>
+            </a:r>
+            <a:endParaRPr kumimoji="1" lang="en-US" altLang="zh-CN" sz="1400" b="1" dirty="0">
+              <a:latin typeface="Times New Roman" panose="02020603050405020304" pitchFamily="18" charset="0"/>
+              <a:ea typeface="SimSun" panose="02010600030101010101" pitchFamily="2" charset="-122"/>
+              <a:cs typeface="Times New Roman" panose="02020603050405020304" pitchFamily="18" charset="0"/>
+            </a:endParaRPr>
+          </a:p>
+          <a:p>
+            <a:pPr algn="ctr"/>
+            <a:r>
+              <a:rPr kumimoji="1" lang="zh-CN" altLang="en-US" sz="1400" b="1" dirty="0">
+                <a:latin typeface="Times New Roman" panose="02020603050405020304" pitchFamily="18" charset="0"/>
+                <a:ea typeface="SimSun" panose="02010600030101010101" pitchFamily="2" charset="-122"/>
+                <a:cs typeface="Times New Roman" panose="02020603050405020304" pitchFamily="18" charset="0"/>
+              </a:rPr>
+              <a:t>编码器</a:t>
+            </a:r>
+          </a:p>
+        </p:txBody>
+      </p:sp>
+      <p:sp>
+        <p:nvSpPr>
+          <p:cNvPr id="38" name="矩形 37">
+            <a:extLst>
+              <a:ext uri="{FF2B5EF4-FFF2-40B4-BE49-F238E27FC236}">
+                <a16:creationId xmlns:a16="http://schemas.microsoft.com/office/drawing/2014/main" id="{DB9B1C08-F579-144F-BDC2-2712269C1179}"/>
+              </a:ext>
+            </a:extLst>
+          </p:cNvPr>
+          <p:cNvSpPr/>
+          <p:nvPr/>
+        </p:nvSpPr>
+        <p:spPr>
+          <a:xfrm>
+            <a:off x="9560311" y="5203745"/>
+            <a:ext cx="707265" cy="386220"/>
+          </a:xfrm>
+          <a:prstGeom prst="rect">
+            <a:avLst/>
+          </a:prstGeom>
+          <a:solidFill>
+            <a:schemeClr val="bg1"/>
+          </a:solidFill>
+          <a:ln>
+            <a:noFill/>
+          </a:ln>
+        </p:spPr>
+        <p:style>
+          <a:lnRef idx="2">
+            <a:schemeClr val="accent1">
+              <a:shade val="50000"/>
+            </a:schemeClr>
+          </a:lnRef>
+          <a:fillRef idx="1">
+            <a:schemeClr val="accent1"/>
+          </a:fillRef>
+          <a:effectRef idx="0">
+            <a:schemeClr val="accent1"/>
+          </a:effectRef>
+          <a:fontRef idx="minor">
+            <a:schemeClr val="lt1"/>
+          </a:fontRef>
+        </p:style>
+        <p:txBody>
+          <a:bodyPr rtlCol="0" anchor="ctr"/>
+          <a:lstStyle/>
+          <a:p>
+            <a:pPr algn="ctr"/>
+            <a:endParaRPr kumimoji="1" lang="zh-CN" altLang="en-US" sz="1600"/>
+          </a:p>
+        </p:txBody>
+      </p:sp>
+      <p:sp>
+        <p:nvSpPr>
+          <p:cNvPr id="15" name="文本框 14">
+            <a:extLst>
+              <a:ext uri="{FF2B5EF4-FFF2-40B4-BE49-F238E27FC236}">
+                <a16:creationId xmlns:a16="http://schemas.microsoft.com/office/drawing/2014/main" id="{F03A3DC2-B367-E84E-90FD-411843DE98D6}"/>
+              </a:ext>
+            </a:extLst>
+          </p:cNvPr>
+          <p:cNvSpPr txBox="1"/>
+          <p:nvPr/>
+        </p:nvSpPr>
+        <p:spPr>
+          <a:xfrm>
+            <a:off x="9513833" y="5179903"/>
+            <a:ext cx="800219" cy="276999"/>
+          </a:xfrm>
+          <a:prstGeom prst="rect">
+            <a:avLst/>
+          </a:prstGeom>
+          <a:noFill/>
+        </p:spPr>
+        <p:txBody>
+          <a:bodyPr wrap="none" rtlCol="0">
+            <a:spAutoFit/>
+          </a:bodyPr>
+          <a:lstStyle/>
+          <a:p>
+            <a:r>
+              <a:rPr kumimoji="1" lang="zh-CN" altLang="en-US" sz="1200" dirty="0">
+                <a:latin typeface="Times New Roman" panose="02020603050405020304" pitchFamily="18" charset="0"/>
+                <a:ea typeface="SimSun" panose="02010600030101010101" pitchFamily="2" charset="-122"/>
+                <a:cs typeface="Times New Roman" panose="02020603050405020304" pitchFamily="18" charset="0"/>
+              </a:rPr>
+              <a:t>缝纫版型</a:t>
+            </a:r>
+          </a:p>
+        </p:txBody>
+      </p:sp>
+      <p:sp>
+        <p:nvSpPr>
+          <p:cNvPr id="39" name="矩形 38">
+            <a:extLst>
+              <a:ext uri="{FF2B5EF4-FFF2-40B4-BE49-F238E27FC236}">
+                <a16:creationId xmlns:a16="http://schemas.microsoft.com/office/drawing/2014/main" id="{3A73A89A-BD9B-5B4E-BC44-B904DD59508E}"/>
+              </a:ext>
+            </a:extLst>
+          </p:cNvPr>
+          <p:cNvSpPr/>
+          <p:nvPr/>
+        </p:nvSpPr>
+        <p:spPr>
+          <a:xfrm>
+            <a:off x="9486527" y="2472477"/>
+            <a:ext cx="707265" cy="386220"/>
+          </a:xfrm>
+          <a:prstGeom prst="rect">
+            <a:avLst/>
+          </a:prstGeom>
+          <a:solidFill>
+            <a:schemeClr val="bg1"/>
+          </a:solidFill>
+          <a:ln>
+            <a:noFill/>
+          </a:ln>
+        </p:spPr>
+        <p:style>
+          <a:lnRef idx="2">
+            <a:schemeClr val="accent1">
+              <a:shade val="50000"/>
+            </a:schemeClr>
+          </a:lnRef>
+          <a:fillRef idx="1">
+            <a:schemeClr val="accent1"/>
+          </a:fillRef>
+          <a:effectRef idx="0">
+            <a:schemeClr val="accent1"/>
+          </a:effectRef>
+          <a:fontRef idx="minor">
+            <a:schemeClr val="lt1"/>
+          </a:fontRef>
+        </p:style>
+        <p:txBody>
+          <a:bodyPr rtlCol="0" anchor="ctr"/>
+          <a:lstStyle/>
+          <a:p>
+            <a:pPr algn="ctr"/>
+            <a:endParaRPr kumimoji="1" lang="zh-CN" altLang="en-US" sz="1600"/>
+          </a:p>
+        </p:txBody>
+      </p:sp>
+      <p:sp>
+        <p:nvSpPr>
+          <p:cNvPr id="40" name="矩形 39">
+            <a:extLst>
+              <a:ext uri="{FF2B5EF4-FFF2-40B4-BE49-F238E27FC236}">
+                <a16:creationId xmlns:a16="http://schemas.microsoft.com/office/drawing/2014/main" id="{8E2A1542-212F-F848-B6CD-9BF72041DCB9}"/>
+              </a:ext>
+            </a:extLst>
+          </p:cNvPr>
+          <p:cNvSpPr/>
+          <p:nvPr/>
+        </p:nvSpPr>
+        <p:spPr>
+          <a:xfrm>
+            <a:off x="10538555" y="2777390"/>
+            <a:ext cx="917129" cy="386220"/>
+          </a:xfrm>
+          <a:prstGeom prst="rect">
+            <a:avLst/>
+          </a:prstGeom>
+          <a:solidFill>
+            <a:schemeClr val="bg1"/>
+          </a:solidFill>
+          <a:ln>
+            <a:noFill/>
+          </a:ln>
+        </p:spPr>
+        <p:style>
+          <a:lnRef idx="2">
+            <a:schemeClr val="accent1">
+              <a:shade val="50000"/>
+            </a:schemeClr>
+          </a:lnRef>
+          <a:fillRef idx="1">
+            <a:schemeClr val="accent1"/>
+          </a:fillRef>
+          <a:effectRef idx="0">
+            <a:schemeClr val="accent1"/>
+          </a:effectRef>
+          <a:fontRef idx="minor">
+            <a:schemeClr val="lt1"/>
+          </a:fontRef>
+        </p:style>
+        <p:txBody>
+          <a:bodyPr rtlCol="0" anchor="ctr"/>
+          <a:lstStyle/>
+          <a:p>
+            <a:pPr algn="ctr"/>
+            <a:endParaRPr kumimoji="1" lang="zh-CN" altLang="en-US" sz="1600"/>
+          </a:p>
+        </p:txBody>
+      </p:sp>
+      <p:sp>
+        <p:nvSpPr>
+          <p:cNvPr id="14" name="文本框 13">
+            <a:extLst>
+              <a:ext uri="{FF2B5EF4-FFF2-40B4-BE49-F238E27FC236}">
+                <a16:creationId xmlns:a16="http://schemas.microsoft.com/office/drawing/2014/main" id="{B8DE53E6-4208-A54A-A894-61B4806546B5}"/>
+              </a:ext>
+            </a:extLst>
+          </p:cNvPr>
+          <p:cNvSpPr txBox="1"/>
+          <p:nvPr/>
+        </p:nvSpPr>
+        <p:spPr>
+          <a:xfrm>
+            <a:off x="10785889" y="2787459"/>
+            <a:ext cx="800219" cy="276999"/>
+          </a:xfrm>
+          <a:prstGeom prst="rect">
+            <a:avLst/>
+          </a:prstGeom>
+          <a:noFill/>
+        </p:spPr>
+        <p:txBody>
+          <a:bodyPr wrap="none" rtlCol="0">
+            <a:spAutoFit/>
+          </a:bodyPr>
+          <a:lstStyle/>
+          <a:p>
+            <a:r>
+              <a:rPr kumimoji="1" lang="zh-CN" altLang="en-US" sz="1200" dirty="0">
+                <a:latin typeface="Times New Roman" panose="02020603050405020304" pitchFamily="18" charset="0"/>
+                <a:ea typeface="SimSun" panose="02010600030101010101" pitchFamily="2" charset="-122"/>
+                <a:cs typeface="Times New Roman" panose="02020603050405020304" pitchFamily="18" charset="0"/>
+              </a:rPr>
+              <a:t>重建服装</a:t>
+            </a:r>
+          </a:p>
+        </p:txBody>
+      </p:sp>
+      <p:sp>
+        <p:nvSpPr>
+          <p:cNvPr id="13" name="文本框 12">
+            <a:extLst>
+              <a:ext uri="{FF2B5EF4-FFF2-40B4-BE49-F238E27FC236}">
+                <a16:creationId xmlns:a16="http://schemas.microsoft.com/office/drawing/2014/main" id="{E1ED725A-0368-AC46-8B24-C2995BB9C104}"/>
+              </a:ext>
+            </a:extLst>
+          </p:cNvPr>
+          <p:cNvSpPr txBox="1"/>
+          <p:nvPr/>
+        </p:nvSpPr>
+        <p:spPr>
+          <a:xfrm>
+            <a:off x="9631713" y="2418272"/>
+            <a:ext cx="492443" cy="276999"/>
+          </a:xfrm>
+          <a:prstGeom prst="rect">
+            <a:avLst/>
+          </a:prstGeom>
+          <a:noFill/>
+        </p:spPr>
+        <p:txBody>
+          <a:bodyPr wrap="none" rtlCol="0">
+            <a:spAutoFit/>
+          </a:bodyPr>
+          <a:lstStyle/>
+          <a:p>
+            <a:r>
+              <a:rPr kumimoji="1" lang="zh-CN" altLang="en-US" sz="1200" dirty="0">
+                <a:latin typeface="Times New Roman" panose="02020603050405020304" pitchFamily="18" charset="0"/>
+                <a:ea typeface="SimSun" panose="02010600030101010101" pitchFamily="2" charset="-122"/>
+                <a:cs typeface="Times New Roman" panose="02020603050405020304" pitchFamily="18" charset="0"/>
+              </a:rPr>
+              <a:t>版型</a:t>
+            </a:r>
+          </a:p>
+        </p:txBody>
+      </p:sp>
+      <p:sp>
+        <p:nvSpPr>
+          <p:cNvPr id="41" name="矩形 40">
+            <a:extLst>
+              <a:ext uri="{FF2B5EF4-FFF2-40B4-BE49-F238E27FC236}">
+                <a16:creationId xmlns:a16="http://schemas.microsoft.com/office/drawing/2014/main" id="{F73C33C9-873E-0B42-B56A-FCB75F63CD28}"/>
+              </a:ext>
+            </a:extLst>
+          </p:cNvPr>
+          <p:cNvSpPr/>
+          <p:nvPr/>
+        </p:nvSpPr>
+        <p:spPr>
+          <a:xfrm>
+            <a:off x="8368230" y="2666321"/>
+            <a:ext cx="707265" cy="386220"/>
+          </a:xfrm>
+          <a:prstGeom prst="rect">
+            <a:avLst/>
+          </a:prstGeom>
+          <a:solidFill>
+            <a:schemeClr val="bg1"/>
+          </a:solidFill>
+          <a:ln>
+            <a:noFill/>
+          </a:ln>
+        </p:spPr>
+        <p:style>
+          <a:lnRef idx="2">
+            <a:schemeClr val="accent1">
+              <a:shade val="50000"/>
+            </a:schemeClr>
+          </a:lnRef>
+          <a:fillRef idx="1">
+            <a:schemeClr val="accent1"/>
+          </a:fillRef>
+          <a:effectRef idx="0">
+            <a:schemeClr val="accent1"/>
+          </a:effectRef>
+          <a:fontRef idx="minor">
+            <a:schemeClr val="lt1"/>
+          </a:fontRef>
+        </p:style>
+        <p:txBody>
+          <a:bodyPr rtlCol="0" anchor="ctr"/>
+          <a:lstStyle/>
+          <a:p>
+            <a:pPr algn="ctr"/>
+            <a:endParaRPr kumimoji="1" lang="zh-CN" altLang="en-US" sz="1600"/>
+          </a:p>
+        </p:txBody>
+      </p:sp>
+      <p:sp>
+        <p:nvSpPr>
+          <p:cNvPr id="12" name="文本框 11">
+            <a:extLst>
+              <a:ext uri="{FF2B5EF4-FFF2-40B4-BE49-F238E27FC236}">
+                <a16:creationId xmlns:a16="http://schemas.microsoft.com/office/drawing/2014/main" id="{DD8EA5BD-82DB-2F46-A1A5-FD127F121317}"/>
+              </a:ext>
+            </a:extLst>
+          </p:cNvPr>
+          <p:cNvSpPr txBox="1"/>
+          <p:nvPr/>
+        </p:nvSpPr>
+        <p:spPr>
+          <a:xfrm>
+            <a:off x="8514667" y="2664781"/>
+            <a:ext cx="492443" cy="461665"/>
+          </a:xfrm>
+          <a:prstGeom prst="rect">
+            <a:avLst/>
+          </a:prstGeom>
+          <a:noFill/>
+        </p:spPr>
+        <p:txBody>
+          <a:bodyPr wrap="none" rtlCol="0">
+            <a:spAutoFit/>
+          </a:bodyPr>
+          <a:lstStyle/>
+          <a:p>
+            <a:r>
+              <a:rPr kumimoji="1" lang="zh-CN" altLang="en-US" sz="1200" dirty="0">
+                <a:latin typeface="Times New Roman" panose="02020603050405020304" pitchFamily="18" charset="0"/>
+                <a:ea typeface="SimSun" panose="02010600030101010101" pitchFamily="2" charset="-122"/>
+                <a:cs typeface="Times New Roman" panose="02020603050405020304" pitchFamily="18" charset="0"/>
+              </a:rPr>
+              <a:t>估计</a:t>
+            </a:r>
+            <a:endParaRPr kumimoji="1" lang="en-US" altLang="zh-CN" sz="1200" dirty="0">
+              <a:latin typeface="Times New Roman" panose="02020603050405020304" pitchFamily="18" charset="0"/>
+              <a:ea typeface="SimSun" panose="02010600030101010101" pitchFamily="2" charset="-122"/>
+              <a:cs typeface="Times New Roman" panose="02020603050405020304" pitchFamily="18" charset="0"/>
+            </a:endParaRPr>
+          </a:p>
+          <a:p>
+            <a:r>
+              <a:rPr kumimoji="1" lang="zh-CN" altLang="en-US" sz="1200" dirty="0">
+                <a:latin typeface="Times New Roman" panose="02020603050405020304" pitchFamily="18" charset="0"/>
+                <a:ea typeface="SimSun" panose="02010600030101010101" pitchFamily="2" charset="-122"/>
+                <a:cs typeface="Times New Roman" panose="02020603050405020304" pitchFamily="18" charset="0"/>
+              </a:rPr>
+              <a:t>边缘</a:t>
+            </a:r>
+          </a:p>
+        </p:txBody>
+      </p:sp>
+      <p:sp>
+        <p:nvSpPr>
+          <p:cNvPr id="42" name="矩形 41">
+            <a:extLst>
+              <a:ext uri="{FF2B5EF4-FFF2-40B4-BE49-F238E27FC236}">
+                <a16:creationId xmlns:a16="http://schemas.microsoft.com/office/drawing/2014/main" id="{D2373626-6BA0-2E4B-9F90-A872A8CF5A05}"/>
+              </a:ext>
+            </a:extLst>
+          </p:cNvPr>
+          <p:cNvSpPr/>
+          <p:nvPr/>
+        </p:nvSpPr>
+        <p:spPr>
+          <a:xfrm rot="5400000">
+            <a:off x="7613752" y="4359307"/>
+            <a:ext cx="1093157" cy="415797"/>
+          </a:xfrm>
+          <a:prstGeom prst="rect">
+            <a:avLst/>
+          </a:prstGeom>
+          <a:solidFill>
+            <a:srgbClr val="D9EBD2"/>
+          </a:solidFill>
+          <a:ln>
+            <a:noFill/>
+          </a:ln>
+        </p:spPr>
+        <p:style>
+          <a:lnRef idx="2">
+            <a:schemeClr val="accent1">
+              <a:shade val="50000"/>
+            </a:schemeClr>
+          </a:lnRef>
+          <a:fillRef idx="1">
+            <a:schemeClr val="accent1"/>
+          </a:fillRef>
+          <a:effectRef idx="0">
+            <a:schemeClr val="accent1"/>
+          </a:effectRef>
+          <a:fontRef idx="minor">
+            <a:schemeClr val="lt1"/>
+          </a:fontRef>
+        </p:style>
+        <p:txBody>
+          <a:bodyPr rtlCol="0" anchor="ctr"/>
+          <a:lstStyle/>
+          <a:p>
+            <a:pPr algn="ctr"/>
+            <a:endParaRPr kumimoji="1" lang="zh-CN" altLang="en-US" sz="1600"/>
+          </a:p>
+        </p:txBody>
+      </p:sp>
+      <p:sp>
+        <p:nvSpPr>
+          <p:cNvPr id="16" name="文本框 15">
+            <a:extLst>
+              <a:ext uri="{FF2B5EF4-FFF2-40B4-BE49-F238E27FC236}">
+                <a16:creationId xmlns:a16="http://schemas.microsoft.com/office/drawing/2014/main" id="{B3DF6B54-D57A-B344-A17A-185940E2ED20}"/>
+              </a:ext>
+            </a:extLst>
+          </p:cNvPr>
+          <p:cNvSpPr txBox="1"/>
+          <p:nvPr/>
+        </p:nvSpPr>
+        <p:spPr>
+          <a:xfrm rot="5400000">
+            <a:off x="7730381" y="4457193"/>
+            <a:ext cx="902811" cy="307777"/>
+          </a:xfrm>
+          <a:prstGeom prst="rect">
+            <a:avLst/>
+          </a:prstGeom>
+          <a:noFill/>
+        </p:spPr>
+        <p:txBody>
+          <a:bodyPr wrap="none" rtlCol="0">
+            <a:spAutoFit/>
+          </a:bodyPr>
+          <a:lstStyle/>
+          <a:p>
+            <a:r>
+              <a:rPr kumimoji="1" lang="zh-CN" altLang="en-US" sz="1400" b="1" dirty="0">
+                <a:latin typeface="Times New Roman" panose="02020603050405020304" pitchFamily="18" charset="0"/>
+                <a:ea typeface="SimSun" panose="02010600030101010101" pitchFamily="2" charset="-122"/>
+                <a:cs typeface="Times New Roman" panose="02020603050405020304" pitchFamily="18" charset="0"/>
+              </a:rPr>
+              <a:t>缝纫预测</a:t>
+            </a:r>
+          </a:p>
+        </p:txBody>
+      </p:sp>
     </p:spTree>
     <p:extLst>
       <p:ext uri="{BB962C8B-B14F-4D97-AF65-F5344CB8AC3E}">
@@ -3657,4 +5991,299 @@
     </a:ext>
   </a:extLst>
 </a:theme>
+</file>
+
+<file path=ppt/theme/theme2.xml><?xml version="1.0" encoding="utf-8"?>
+<a:theme xmlns:a="http://schemas.openxmlformats.org/drawingml/2006/main" name="Office 主题​​">
+  <a:themeElements>
+    <a:clrScheme name="Office">
+      <a:dk1>
+        <a:sysClr val="windowText" lastClr="000000"/>
+      </a:dk1>
+      <a:lt1>
+        <a:sysClr val="window" lastClr="FFFFFF"/>
+      </a:lt1>
+      <a:dk2>
+        <a:srgbClr val="44546A"/>
+      </a:dk2>
+      <a:lt2>
+        <a:srgbClr val="E7E6E6"/>
+      </a:lt2>
+      <a:accent1>
+        <a:srgbClr val="4472C4"/>
+      </a:accent1>
+      <a:accent2>
+        <a:srgbClr val="ED7D31"/>
+      </a:accent2>
+      <a:accent3>
+        <a:srgbClr val="A5A5A5"/>
+      </a:accent3>
+      <a:accent4>
+        <a:srgbClr val="FFC000"/>
+      </a:accent4>
+      <a:accent5>
+        <a:srgbClr val="5B9BD5"/>
+      </a:accent5>
+      <a:accent6>
+        <a:srgbClr val="70AD47"/>
+      </a:accent6>
+      <a:hlink>
+        <a:srgbClr val="0563C1"/>
+      </a:hlink>
+      <a:folHlink>
+        <a:srgbClr val="954F72"/>
+      </a:folHlink>
+    </a:clrScheme>
+    <a:fontScheme name="Office">
+      <a:majorFont>
+        <a:latin typeface="等线 Light" panose="020F0302020204030204"/>
+        <a:ea typeface=""/>
+        <a:cs typeface=""/>
+        <a:font script="Jpan" typeface="游ゴシック Light"/>
+        <a:font script="Hang" typeface="맑은 고딕"/>
+        <a:font script="Hans" typeface="等线 Light"/>
+        <a:font script="Hant" typeface="新細明體"/>
+        <a:font script="Arab" typeface="Times New Roman"/>
+        <a:font script="Hebr" typeface="Times New Roman"/>
+        <a:font script="Thai" typeface="Angsana New"/>
+        <a:font script="Ethi" typeface="Nyala"/>
+        <a:font script="Beng" typeface="Vrinda"/>
+        <a:font script="Gujr" typeface="Shruti"/>
+        <a:font script="Khmr" typeface="MoolBoran"/>
+        <a:font script="Knda" typeface="Tunga"/>
+        <a:font script="Guru" typeface="Raavi"/>
+        <a:font script="Cans" typeface="Euphemia"/>
+        <a:font script="Cher" typeface="Plantagenet Cherokee"/>
+        <a:font script="Yiii" typeface="Microsoft Yi Baiti"/>
+        <a:font script="Tibt" typeface="Microsoft Himalaya"/>
+        <a:font script="Thaa" typeface="MV Boli"/>
+        <a:font script="Deva" typeface="Mangal"/>
+        <a:font script="Telu" typeface="Gautami"/>
+        <a:font script="Taml" typeface="Latha"/>
+        <a:font script="Syrc" typeface="Estrangelo Edessa"/>
+        <a:font script="Orya" typeface="Kalinga"/>
+        <a:font script="Mlym" typeface="Kartika"/>
+        <a:font script="Laoo" typeface="DokChampa"/>
+        <a:font script="Sinh" typeface="Iskoola Pota"/>
+        <a:font script="Mong" typeface="Mongolian Baiti"/>
+        <a:font script="Viet" typeface="Times New Roman"/>
+        <a:font script="Uigh" typeface="Microsoft Uighur"/>
+        <a:font script="Geor" typeface="Sylfaen"/>
+        <a:font script="Armn" typeface="Arial"/>
+        <a:font script="Bugi" typeface="Leelawadee UI"/>
+        <a:font script="Bopo" typeface="Microsoft JhengHei"/>
+        <a:font script="Java" typeface="Javanese Text"/>
+        <a:font script="Lisu" typeface="Segoe UI"/>
+        <a:font script="Mymr" typeface="Myanmar Text"/>
+        <a:font script="Nkoo" typeface="Ebrima"/>
+        <a:font script="Olck" typeface="Nirmala UI"/>
+        <a:font script="Osma" typeface="Ebrima"/>
+        <a:font script="Phag" typeface="Phagspa"/>
+        <a:font script="Syrn" typeface="Estrangelo Edessa"/>
+        <a:font script="Syrj" typeface="Estrangelo Edessa"/>
+        <a:font script="Syre" typeface="Estrangelo Edessa"/>
+        <a:font script="Sora" typeface="Nirmala UI"/>
+        <a:font script="Tale" typeface="Microsoft Tai Le"/>
+        <a:font script="Talu" typeface="Microsoft New Tai Lue"/>
+        <a:font script="Tfng" typeface="Ebrima"/>
+      </a:majorFont>
+      <a:minorFont>
+        <a:latin typeface="等线" panose="020F0502020204030204"/>
+        <a:ea typeface=""/>
+        <a:cs typeface=""/>
+        <a:font script="Jpan" typeface="游ゴシック"/>
+        <a:font script="Hang" typeface="맑은 고딕"/>
+        <a:font script="Hans" typeface="等线"/>
+        <a:font script="Hant" typeface="新細明體"/>
+        <a:font script="Arab" typeface="Arial"/>
+        <a:font script="Hebr" typeface="Arial"/>
+        <a:font script="Thai" typeface="Cordia New"/>
+        <a:font script="Ethi" typeface="Nyala"/>
+        <a:font script="Beng" typeface="Vrinda"/>
+        <a:font script="Gujr" typeface="Shruti"/>
+        <a:font script="Khmr" typeface="DaunPenh"/>
+        <a:font script="Knda" typeface="Tunga"/>
+        <a:font script="Guru" typeface="Raavi"/>
+        <a:font script="Cans" typeface="Euphemia"/>
+        <a:font script="Cher" typeface="Plantagenet Cherokee"/>
+        <a:font script="Yiii" typeface="Microsoft Yi Baiti"/>
+        <a:font script="Tibt" typeface="Microsoft Himalaya"/>
+        <a:font script="Thaa" typeface="MV Boli"/>
+        <a:font script="Deva" typeface="Mangal"/>
+        <a:font script="Telu" typeface="Gautami"/>
+        <a:font script="Taml" typeface="Latha"/>
+        <a:font script="Syrc" typeface="Estrangelo Edessa"/>
+        <a:font script="Orya" typeface="Kalinga"/>
+        <a:font script="Mlym" typeface="Kartika"/>
+        <a:font script="Laoo" typeface="DokChampa"/>
+        <a:font script="Sinh" typeface="Iskoola Pota"/>
+        <a:font script="Mong" typeface="Mongolian Baiti"/>
+        <a:font script="Viet" typeface="Arial"/>
+        <a:font script="Uigh" typeface="Microsoft Uighur"/>
+        <a:font script="Geor" typeface="Sylfaen"/>
+        <a:font script="Armn" typeface="Arial"/>
+        <a:font script="Bugi" typeface="Leelawadee UI"/>
+        <a:font script="Bopo" typeface="Microsoft JhengHei"/>
+        <a:font script="Java" typeface="Javanese Text"/>
+        <a:font script="Lisu" typeface="Segoe UI"/>
+        <a:font script="Mymr" typeface="Myanmar Text"/>
+        <a:font script="Nkoo" typeface="Ebrima"/>
+        <a:font script="Olck" typeface="Nirmala UI"/>
+        <a:font script="Osma" typeface="Ebrima"/>
+        <a:font script="Phag" typeface="Phagspa"/>
+        <a:font script="Syrn" typeface="Estrangelo Edessa"/>
+        <a:font script="Syrj" typeface="Estrangelo Edessa"/>
+        <a:font script="Syre" typeface="Estrangelo Edessa"/>
+        <a:font script="Sora" typeface="Nirmala UI"/>
+        <a:font script="Tale" typeface="Microsoft Tai Le"/>
+        <a:font script="Talu" typeface="Microsoft New Tai Lue"/>
+        <a:font script="Tfng" typeface="Ebrima"/>
+      </a:minorFont>
+    </a:fontScheme>
+    <a:fmtScheme name="Office">
+      <a:fillStyleLst>
+        <a:solidFill>
+          <a:schemeClr val="phClr"/>
+        </a:solidFill>
+        <a:gradFill rotWithShape="1">
+          <a:gsLst>
+            <a:gs pos="0">
+              <a:schemeClr val="phClr">
+                <a:lumMod val="110000"/>
+                <a:satMod val="105000"/>
+                <a:tint val="67000"/>
+              </a:schemeClr>
+            </a:gs>
+            <a:gs pos="50000">
+              <a:schemeClr val="phClr">
+                <a:lumMod val="105000"/>
+                <a:satMod val="103000"/>
+                <a:tint val="73000"/>
+              </a:schemeClr>
+            </a:gs>
+            <a:gs pos="100000">
+              <a:schemeClr val="phClr">
+                <a:lumMod val="105000"/>
+                <a:satMod val="109000"/>
+                <a:tint val="81000"/>
+              </a:schemeClr>
+            </a:gs>
+          </a:gsLst>
+          <a:lin ang="5400000" scaled="0"/>
+        </a:gradFill>
+        <a:gradFill rotWithShape="1">
+          <a:gsLst>
+            <a:gs pos="0">
+              <a:schemeClr val="phClr">
+                <a:satMod val="103000"/>
+                <a:lumMod val="102000"/>
+                <a:tint val="94000"/>
+              </a:schemeClr>
+            </a:gs>
+            <a:gs pos="50000">
+              <a:schemeClr val="phClr">
+                <a:satMod val="110000"/>
+                <a:lumMod val="100000"/>
+                <a:shade val="100000"/>
+              </a:schemeClr>
+            </a:gs>
+            <a:gs pos="100000">
+              <a:schemeClr val="phClr">
+                <a:lumMod val="99000"/>
+                <a:satMod val="120000"/>
+                <a:shade val="78000"/>
+              </a:schemeClr>
+            </a:gs>
+          </a:gsLst>
+          <a:lin ang="5400000" scaled="0"/>
+        </a:gradFill>
+      </a:fillStyleLst>
+      <a:lnStyleLst>
+        <a:ln w="6350" cap="flat" cmpd="sng" algn="ctr">
+          <a:solidFill>
+            <a:schemeClr val="phClr"/>
+          </a:solidFill>
+          <a:prstDash val="solid"/>
+          <a:miter lim="800000"/>
+        </a:ln>
+        <a:ln w="12700" cap="flat" cmpd="sng" algn="ctr">
+          <a:solidFill>
+            <a:schemeClr val="phClr"/>
+          </a:solidFill>
+          <a:prstDash val="solid"/>
+          <a:miter lim="800000"/>
+        </a:ln>
+        <a:ln w="19050" cap="flat" cmpd="sng" algn="ctr">
+          <a:solidFill>
+            <a:schemeClr val="phClr"/>
+          </a:solidFill>
+          <a:prstDash val="solid"/>
+          <a:miter lim="800000"/>
+        </a:ln>
+      </a:lnStyleLst>
+      <a:effectStyleLst>
+        <a:effectStyle>
+          <a:effectLst/>
+        </a:effectStyle>
+        <a:effectStyle>
+          <a:effectLst/>
+        </a:effectStyle>
+        <a:effectStyle>
+          <a:effectLst>
+            <a:outerShdw blurRad="57150" dist="19050" dir="5400000" algn="ctr" rotWithShape="0">
+              <a:srgbClr val="000000">
+                <a:alpha val="63000"/>
+              </a:srgbClr>
+            </a:outerShdw>
+          </a:effectLst>
+        </a:effectStyle>
+      </a:effectStyleLst>
+      <a:bgFillStyleLst>
+        <a:solidFill>
+          <a:schemeClr val="phClr"/>
+        </a:solidFill>
+        <a:solidFill>
+          <a:schemeClr val="phClr">
+            <a:tint val="95000"/>
+            <a:satMod val="170000"/>
+          </a:schemeClr>
+        </a:solidFill>
+        <a:gradFill rotWithShape="1">
+          <a:gsLst>
+            <a:gs pos="0">
+              <a:schemeClr val="phClr">
+                <a:tint val="93000"/>
+                <a:satMod val="150000"/>
+                <a:shade val="98000"/>
+                <a:lumMod val="102000"/>
+              </a:schemeClr>
+            </a:gs>
+            <a:gs pos="50000">
+              <a:schemeClr val="phClr">
+                <a:tint val="98000"/>
+                <a:satMod val="130000"/>
+                <a:shade val="90000"/>
+                <a:lumMod val="103000"/>
+              </a:schemeClr>
+            </a:gs>
+            <a:gs pos="100000">
+              <a:schemeClr val="phClr">
+                <a:shade val="63000"/>
+                <a:satMod val="120000"/>
+              </a:schemeClr>
+            </a:gs>
+          </a:gsLst>
+          <a:lin ang="5400000" scaled="0"/>
+        </a:gradFill>
+      </a:bgFillStyleLst>
+    </a:fmtScheme>
+  </a:themeElements>
+  <a:objectDefaults/>
+  <a:extraClrSchemeLst/>
+  <a:extLst>
+    <a:ext uri="{05A4C25C-085E-4340-85A3-A5531E510DB2}">
+      <thm15:themeFamily xmlns:thm15="http://schemas.microsoft.com/office/thememl/2012/main" name="Office Theme" id="{62F939B6-93AF-4DB8-9C6B-D6C7DFDC589F}" vid="{4A3C46E8-61CC-4603-A589-7422A47A8E4A}"/>
+    </a:ext>
+  </a:extLst>
+</a:theme>
 </file>